--- a/forms/한우리_수업도우미_사용안내.pptx
+++ b/forms/한우리_수업도우미_사용안내.pptx
@@ -11034,6 +11034,65 @@
               <a:t>엑셀 양식은 페이지 맨 위 '양식·안내 받기'에서 받아요.</a:t>
             </a:r>
             <a:endParaRPr lang="en-US" sz="1600" dirty="0"/>
+          </a:p>
+        </p:txBody>
+      </p:sp>
+      <p:sp>
+        <p:nvSpPr>
+          <p:cNvPr id="8" name="Shape 5"/>
+          <p:cNvSpPr/>
+          <p:nvPr/>
+        </p:nvSpPr>
+        <p:spPr>
+          <a:xfrm>
+            <a:off x="3657600" y="5074920"/>
+            <a:ext cx="7863840" cy="0"/>
+          </a:xfrm>
+          <a:prstGeom prst="line">
+            <a:avLst/>
+          </a:prstGeom>
+          <a:noFill/>
+          <a:ln w="12700">
+            <a:solidFill>
+              <a:srgbClr val="3D4E7A"/>
+            </a:solidFill>
+            <a:prstDash val="solid"/>
+          </a:ln>
+        </p:spPr>
+      </p:sp>
+      <p:sp>
+        <p:nvSpPr>
+          <p:cNvPr id="9" name="Text 6"/>
+          <p:cNvSpPr txBox="1"/>
+          <p:nvPr/>
+        </p:nvSpPr>
+        <p:spPr>
+          <a:xfrm>
+            <a:off x="3657600" y="5303520"/>
+            <a:ext cx="7863840" cy="548640"/>
+          </a:xfrm>
+          <a:prstGeom prst="rect">
+            <a:avLst/>
+          </a:prstGeom>
+          <a:noFill/>
+          <a:ln/>
+        </p:spPr>
+        <p:txBody>
+          <a:bodyPr wrap="square" lIns="0" tIns="0" rIns="0" bIns="0" rtlCol="0" anchor="ctr"/>
+          <a:lstStyle/>
+          <a:p>
+            <a:pPr algn="r" indent="0" marL="0">
+              <a:buNone/>
+            </a:pPr>
+            <a:r>
+              <a:rPr lang="en-US" sz="2200" b="1" dirty="0">
+                <a:solidFill>
+                  <a:srgbClr val="FFFFFF"/>
+                </a:solidFill>
+              </a:rPr>
+              <a:t>한우리 안산단원지부 드림</a:t>
+            </a:r>
+            <a:endParaRPr lang="en-US" sz="2200" dirty="0"/>
           </a:p>
         </p:txBody>
       </p:sp>

--- a/forms/한우리_수업도우미_사용안내.pptx
+++ b/forms/한우리_수업도우미_사용안내.pptx
@@ -25,9 +25,10 @@
     <p:sldId id="273" r:id="rId19"/>
     <p:sldId id="274" r:id="rId20"/>
     <p:sldId id="275" r:id="rId21"/>
+    <p:sldId id="276" r:id="rId22"/>
   </p:sldIdLst>
   <p:notesMasterIdLst>
-    <p:notesMasterId r:id="rId22"/>
+    <p:notesMasterId r:id="rId23"/>
   </p:notesMasterIdLst>
   <p:sldSz cx="12192000" cy="6858000"/>
   <p:notesSz cx="6858000" cy="12192000"/>
@@ -1601,6 +1602,94 @@
             <a:fld id="{F7021451-1387-4CA6-816F-3879F97B5CBC}" type="slidenum">
               <a:rPr lang="en-US"/>
               <a:t>20</a:t>
+            </a:fld>
+            <a:endParaRPr lang="en-US"/>
+          </a:p>
+        </p:txBody>
+      </p:sp>
+    </p:spTree>
+    <p:extLst>
+      <p:ext uri="{BB962C8B-B14F-4D97-AF65-F5344CB8AC3E}">
+        <p14:creationId xmlns:p14="http://schemas.microsoft.com/office/powerpoint/2010/main" val="1024086991"/>
+      </p:ext>
+    </p:extLst>
+  </p:cSld>
+  <p:clrMapOvr>
+    <a:masterClrMapping/>
+  </p:clrMapOvr>
+</p:notes>
+</file>
+
+<file path=ppt/notesSlides/notesSlide21.xml><?xml version="1.0" encoding="utf-8"?>
+<p:notes xmlns:a="http://schemas.openxmlformats.org/drawingml/2006/main" xmlns:r="http://schemas.openxmlformats.org/officeDocument/2006/relationships" xmlns:p="http://schemas.openxmlformats.org/presentationml/2006/main">
+  <p:cSld>
+    <p:spTree>
+      <p:nvGrpSpPr>
+        <p:cNvPr id="1" name=""/>
+        <p:cNvGrpSpPr/>
+        <p:nvPr/>
+      </p:nvGrpSpPr>
+      <p:grpSpPr>
+        <a:xfrm>
+          <a:off x="0" y="0"/>
+          <a:ext cx="0" cy="0"/>
+          <a:chOff x="0" y="0"/>
+          <a:chExt cx="0" cy="0"/>
+        </a:xfrm>
+      </p:grpSpPr>
+      <p:sp>
+        <p:nvSpPr>
+          <p:cNvPr id="2" name="Slide Image Placeholder 1"/>
+          <p:cNvSpPr>
+            <a:spLocks noGrp="1" noRot="1" noChangeAspect="1"/>
+          </p:cNvSpPr>
+          <p:nvPr>
+            <p:ph type="sldImg"/>
+          </p:nvPr>
+        </p:nvSpPr>
+        <p:spPr/>
+      </p:sp>
+      <p:sp>
+        <p:nvSpPr>
+          <p:cNvPr id="3" name="Notes Placeholder 2"/>
+          <p:cNvSpPr>
+            <a:spLocks noGrp="1"/>
+          </p:cNvSpPr>
+          <p:nvPr>
+            <p:ph type="body" idx="1"/>
+          </p:nvPr>
+        </p:nvSpPr>
+        <p:spPr/>
+        <p:txBody>
+          <a:bodyPr/>
+          <a:lstStyle/>
+          <a:p>
+            <a:r>
+              <a:rPr lang="en-US" dirty="0"/>
+              <a:t/>
+            </a:r>
+            <a:endParaRPr lang="en-US" dirty="0"/>
+          </a:p>
+        </p:txBody>
+      </p:sp>
+      <p:sp>
+        <p:nvSpPr>
+          <p:cNvPr id="4" name="Slide Number Placeholder 3"/>
+          <p:cNvSpPr>
+            <a:spLocks noGrp="1"/>
+          </p:cNvSpPr>
+          <p:nvPr>
+            <p:ph type="sldNum" sz="quarter" idx="10"/>
+          </p:nvPr>
+        </p:nvSpPr>
+        <p:spPr/>
+        <p:txBody>
+          <a:bodyPr/>
+          <a:lstStyle/>
+          <a:p>
+            <a:fld id="{F7021451-1387-4CA6-816F-3879F97B5CBC}" type="slidenum">
+              <a:rPr lang="en-US"/>
+              <a:t>21</a:t>
             </a:fld>
             <a:endParaRPr lang="en-US"/>
           </a:p>
@@ -3739,7 +3828,7 @@
                   <a:srgbClr val="2B3550"/>
                 </a:solidFill>
               </a:rPr>
-              <a:t>엑셀 적는 법이 헷갈려요</a:t>
+              <a:t>휴대폰에서 저장이 안 돼요</a:t>
             </a:r>
             <a:endParaRPr lang="en-US" sz="1500" dirty="0"/>
           </a:p>
@@ -3775,7 +3864,7 @@
                   <a:srgbClr val="5B6680"/>
                 </a:solidFill>
               </a:rPr>
-              <a:t>페이지 맨 아래 '이번 달 등록된 과정과 책 보기'에서 확인해요.</a:t>
+              <a:t>저장을 누르면 공유 창이 열려요. 안 되면 그림이 크게 뜨니 길게 눌러 저장해요. 카톡 링크는 기본 브라우저로 다시 열려요.</a:t>
             </a:r>
             <a:endParaRPr lang="en-US" sz="1300" dirty="0"/>
           </a:p>
@@ -4151,7 +4240,7 @@
                   <a:srgbClr val="FFFFFF"/>
                 </a:solidFill>
               </a:rPr>
-              <a:t>숙제 엑셀</a:t>
+              <a:t>반 명단이</a:t>
             </a:r>
             <a:endParaRPr lang="en-US" sz="1700" dirty="0"/>
           </a:p>
@@ -4165,7 +4254,7 @@
                   <a:srgbClr val="FFFFFF"/>
                 </a:solidFill>
               </a:rPr>
-              <a:t>준비하기</a:t>
+              <a:t>들어왔는지 확인</a:t>
             </a:r>
             <a:endParaRPr lang="en-US" sz="1700" dirty="0"/>
           </a:p>
@@ -4289,7 +4378,7 @@
                   <a:srgbClr val="FFFFFF"/>
                 </a:solidFill>
               </a:rPr>
-              <a:t>숙제 안내문 탭에서</a:t>
+              <a:t>숙제 적기</a:t>
             </a:r>
             <a:endParaRPr lang="en-US" sz="1700" dirty="0"/>
           </a:p>
@@ -4303,7 +4392,7 @@
                   <a:srgbClr val="FFFFFF"/>
                 </a:solidFill>
               </a:rPr>
-              <a:t>숙제 엑셀 올리기</a:t>
+              <a:t>(화면 또는 엑셀)</a:t>
             </a:r>
             <a:endParaRPr lang="en-US" sz="1700" dirty="0"/>
           </a:p>
@@ -4642,7 +4731,7 @@
                   <a:schemeClr val="tx2"/>
                 </a:solidFill>
               </a:rPr>
-              <a:t>반 명단과 숙제 엑셀이 필요해요</a:t>
+              <a:t>반 명단은 이미 들어와 있어요</a:t>
             </a:r>
             <a:endParaRPr lang="en-US" sz="3000" dirty="0"/>
           </a:p>
@@ -4713,22 +4802,314 @@
       </p:sp>
       <p:sp>
         <p:nvSpPr>
-          <p:cNvPr id="5" name="card"/>
+          <p:cNvPr id="5" name="Shape 3"/>
           <p:cNvSpPr/>
           <p:nvPr/>
         </p:nvSpPr>
         <p:spPr>
           <a:xfrm>
-            <a:off x="548640" y="1280160"/>
-            <a:ext cx="4206240" cy="4892040"/>
+            <a:off x="658368" y="1298448"/>
+            <a:ext cx="2446126" cy="4855464"/>
           </a:xfrm>
           <a:prstGeom prst="roundRect">
             <a:avLst>
-              <a:gd name="adj" fmla="val 3043"/>
+              <a:gd name="adj" fmla="val 4486"/>
             </a:avLst>
           </a:prstGeom>
           <a:solidFill>
             <a:srgbClr val="FFFFFF"/>
+          </a:solidFill>
+          <a:ln w="12700">
+            <a:solidFill>
+              <a:srgbClr val="C9D0DC"/>
+            </a:solidFill>
+            <a:prstDash val="solid"/>
+          </a:ln>
+          <a:effectLst>
+            <a:outerShdw sx="100000" sy="100000" kx="0" ky="0" algn="bl" rotWithShape="0" blurRad="101600" dist="38100" dir="5400000">
+              <a:srgbClr val="1F2A4A">
+                <a:alpha val="18000"/>
+              </a:srgbClr>
+            </a:outerShdw>
+          </a:effectLst>
+        </p:spPr>
+      </p:sp>
+      <p:pic>
+        <p:nvPicPr>
+          <p:cNvPr id="6" name="Image 0" descr="반 명단이 들어온 숙제 안내문 탭">    </p:cNvPr>
+          <p:cNvPicPr>
+            <a:picLocks noChangeAspect="1"/>
+          </p:cNvPicPr>
+          <p:nvPr/>
+        </p:nvPicPr>
+        <p:blipFill>
+          <a:blip r:embed="rId1"/>
+          <a:stretch>
+            <a:fillRect/>
+          </a:stretch>
+        </p:blipFill>
+        <p:spPr>
+          <a:xfrm>
+            <a:off x="731520" y="1371600"/>
+            <a:ext cx="2299822" cy="4709160"/>
+          </a:xfrm>
+          <a:prstGeom prst="rect">
+            <a:avLst/>
+          </a:prstGeom>
+        </p:spPr>
+      </p:pic>
+      <p:sp>
+        <p:nvSpPr>
+          <p:cNvPr id="7" name="num1"/>
+          <p:cNvSpPr/>
+          <p:nvPr/>
+        </p:nvSpPr>
+        <p:spPr>
+          <a:xfrm>
+            <a:off x="3840480" y="1481328"/>
+            <a:ext cx="384048" cy="384048"/>
+          </a:xfrm>
+          <a:prstGeom prst="ellipse">
+            <a:avLst/>
+          </a:prstGeom>
+          <a:solidFill>
+            <a:srgbClr val="E07A3F"/>
+          </a:solidFill>
+          <a:ln w="12700">
+            <a:solidFill>
+              <a:srgbClr val="E07A3F"/>
+            </a:solidFill>
+            <a:prstDash val="solid"/>
+          </a:ln>
+        </p:spPr>
+      </p:sp>
+      <p:sp>
+        <p:nvSpPr>
+          <p:cNvPr id="8" name="Text 5"/>
+          <p:cNvSpPr txBox="1"/>
+          <p:nvPr/>
+        </p:nvSpPr>
+        <p:spPr>
+          <a:xfrm>
+            <a:off x="3840480" y="1481328"/>
+            <a:ext cx="384048" cy="384048"/>
+          </a:xfrm>
+          <a:prstGeom prst="rect">
+            <a:avLst/>
+          </a:prstGeom>
+          <a:noFill/>
+          <a:ln/>
+        </p:spPr>
+        <p:txBody>
+          <a:bodyPr wrap="square" lIns="0" tIns="0" rIns="0" bIns="0" rtlCol="0" anchor="ctr"/>
+          <a:lstStyle/>
+          <a:p>
+            <a:pPr algn="ctr" indent="0" marL="0">
+              <a:buNone/>
+            </a:pPr>
+            <a:r>
+              <a:rPr lang="en-US" sz="1600" b="1" dirty="0">
+                <a:solidFill>
+                  <a:srgbClr val="FFFFFF"/>
+                </a:solidFill>
+              </a:rPr>
+              <a:t>1</a:t>
+            </a:r>
+            <a:endParaRPr lang="en-US" sz="1600" dirty="0"/>
+          </a:p>
+        </p:txBody>
+      </p:sp>
+      <p:sp>
+        <p:nvSpPr>
+          <p:cNvPr id="9" name="Text 6"/>
+          <p:cNvSpPr txBox="1"/>
+          <p:nvPr/>
+        </p:nvSpPr>
+        <p:spPr>
+          <a:xfrm>
+            <a:off x="4389120" y="1426464"/>
+            <a:ext cx="3108960" cy="1389888"/>
+          </a:xfrm>
+          <a:prstGeom prst="rect">
+            <a:avLst/>
+          </a:prstGeom>
+          <a:noFill/>
+          <a:ln/>
+        </p:spPr>
+        <p:txBody>
+          <a:bodyPr wrap="square" lIns="0" tIns="0" rIns="0" bIns="0" rtlCol="0" anchor="t"/>
+          <a:lstStyle/>
+          <a:p>
+            <a:pPr indent="0" marL="0">
+              <a:spcAft>
+                <a:spcPts val="200"/>
+              </a:spcAft>
+              <a:buNone/>
+            </a:pPr>
+            <a:r>
+              <a:rPr lang="en-US" sz="1700" b="1" dirty="0">
+                <a:solidFill>
+                  <a:srgbClr val="2B3550"/>
+                </a:solidFill>
+              </a:rPr>
+              <a:t>반 명단 칸에 파일 이름이 보여요</a:t>
+            </a:r>
+            <a:endParaRPr lang="en-US" sz="1700" dirty="0"/>
+          </a:p>
+          <a:p>
+            <a:pPr indent="0" marL="0">
+              <a:spcAft>
+                <a:spcPts val="200"/>
+              </a:spcAft>
+              <a:buNone/>
+            </a:pPr>
+            <a:r>
+              <a:rPr lang="en-US" sz="1400" dirty="0">
+                <a:solidFill>
+                  <a:srgbClr val="5B6680"/>
+                </a:solidFill>
+              </a:rPr>
+              <a:t>수업계획서 탭에서 올린 명단이 같이 들어와요. 비어 있으면 여기서 올려도 돼요</a:t>
+            </a:r>
+            <a:endParaRPr lang="en-US" sz="1700" dirty="0"/>
+          </a:p>
+        </p:txBody>
+      </p:sp>
+      <p:sp>
+        <p:nvSpPr>
+          <p:cNvPr id="10" name="num2"/>
+          <p:cNvSpPr/>
+          <p:nvPr/>
+        </p:nvSpPr>
+        <p:spPr>
+          <a:xfrm>
+            <a:off x="3840480" y="2944368"/>
+            <a:ext cx="384048" cy="384048"/>
+          </a:xfrm>
+          <a:prstGeom prst="ellipse">
+            <a:avLst/>
+          </a:prstGeom>
+          <a:solidFill>
+            <a:srgbClr val="E07A3F"/>
+          </a:solidFill>
+          <a:ln w="12700">
+            <a:solidFill>
+              <a:srgbClr val="E07A3F"/>
+            </a:solidFill>
+            <a:prstDash val="solid"/>
+          </a:ln>
+        </p:spPr>
+      </p:sp>
+      <p:sp>
+        <p:nvSpPr>
+          <p:cNvPr id="11" name="Text 8"/>
+          <p:cNvSpPr txBox="1"/>
+          <p:nvPr/>
+        </p:nvSpPr>
+        <p:spPr>
+          <a:xfrm>
+            <a:off x="3840480" y="2944368"/>
+            <a:ext cx="384048" cy="384048"/>
+          </a:xfrm>
+          <a:prstGeom prst="rect">
+            <a:avLst/>
+          </a:prstGeom>
+          <a:noFill/>
+          <a:ln/>
+        </p:spPr>
+        <p:txBody>
+          <a:bodyPr wrap="square" lIns="0" tIns="0" rIns="0" bIns="0" rtlCol="0" anchor="ctr"/>
+          <a:lstStyle/>
+          <a:p>
+            <a:pPr algn="ctr" indent="0" marL="0">
+              <a:buNone/>
+            </a:pPr>
+            <a:r>
+              <a:rPr lang="en-US" sz="1600" b="1" dirty="0">
+                <a:solidFill>
+                  <a:srgbClr val="FFFFFF"/>
+                </a:solidFill>
+              </a:rPr>
+              <a:t>2</a:t>
+            </a:r>
+            <a:endParaRPr lang="en-US" sz="1600" dirty="0"/>
+          </a:p>
+        </p:txBody>
+      </p:sp>
+      <p:sp>
+        <p:nvSpPr>
+          <p:cNvPr id="12" name="Text 9"/>
+          <p:cNvSpPr txBox="1"/>
+          <p:nvPr/>
+        </p:nvSpPr>
+        <p:spPr>
+          <a:xfrm>
+            <a:off x="4389120" y="2889504"/>
+            <a:ext cx="3108960" cy="1389888"/>
+          </a:xfrm>
+          <a:prstGeom prst="rect">
+            <a:avLst/>
+          </a:prstGeom>
+          <a:noFill/>
+          <a:ln/>
+        </p:spPr>
+        <p:txBody>
+          <a:bodyPr wrap="square" lIns="0" tIns="0" rIns="0" bIns="0" rtlCol="0" anchor="t"/>
+          <a:lstStyle/>
+          <a:p>
+            <a:pPr indent="0" marL="0">
+              <a:spcAft>
+                <a:spcPts val="200"/>
+              </a:spcAft>
+              <a:buNone/>
+            </a:pPr>
+            <a:r>
+              <a:rPr lang="en-US" sz="1700" b="1" dirty="0">
+                <a:solidFill>
+                  <a:srgbClr val="2B3550"/>
+                </a:solidFill>
+              </a:rPr>
+              <a:t>숙제 엑셀은 없어도 돼요</a:t>
+            </a:r>
+            <a:endParaRPr lang="en-US" sz="1700" dirty="0"/>
+          </a:p>
+          <a:p>
+            <a:pPr indent="0" marL="0">
+              <a:spcAft>
+                <a:spcPts val="200"/>
+              </a:spcAft>
+              <a:buNone/>
+            </a:pPr>
+            <a:r>
+              <a:rPr lang="en-US" sz="1400" dirty="0">
+                <a:solidFill>
+                  <a:srgbClr val="5B6680"/>
+                </a:solidFill>
+              </a:rPr>
+              <a:t>다음 단계에서 화면에 바로 적을 수 있어요</a:t>
+            </a:r>
+            <a:endParaRPr lang="en-US" sz="1700" dirty="0"/>
+          </a:p>
+        </p:txBody>
+      </p:sp>
+      <p:sp>
+        <p:nvSpPr>
+          <p:cNvPr id="13" name="card"/>
+          <p:cNvSpPr/>
+          <p:nvPr/>
+        </p:nvSpPr>
+        <p:spPr>
+          <a:xfrm>
+            <a:off x="7818120" y="1280160"/>
+            <a:ext cx="3794760" cy="4892040"/>
+          </a:xfrm>
+          <a:prstGeom prst="roundRect">
+            <a:avLst>
+              <a:gd name="adj" fmla="val 3373"/>
+            </a:avLst>
+          </a:prstGeom>
+          <a:solidFill>
+            <a:srgbClr val="FFF4D6"/>
           </a:solidFill>
           <a:ln w="9525">
             <a:solidFill>
@@ -4740,60 +5121,38 @@
       </p:sp>
       <p:sp>
         <p:nvSpPr>
-          <p:cNvPr id="6" name="Text 4"/>
-          <p:cNvSpPr txBox="1"/>
-          <p:nvPr/>
-        </p:nvSpPr>
-        <p:spPr>
-          <a:xfrm>
-            <a:off x="822960" y="1508760"/>
-            <a:ext cx="3657600" cy="457200"/>
-          </a:xfrm>
-          <a:prstGeom prst="rect">
-            <a:avLst/>
-          </a:prstGeom>
-          <a:noFill/>
-          <a:ln/>
-        </p:spPr>
-        <p:txBody>
-          <a:bodyPr wrap="square" lIns="0" tIns="0" rIns="0" bIns="0" rtlCol="0" anchor="ctr"/>
+          <p:cNvPr id="14" name="Text 11"/>
+          <p:cNvSpPr txBox="1"/>
+          <p:nvPr/>
+        </p:nvSpPr>
+        <p:spPr>
+          <a:xfrm>
+            <a:off x="8046720" y="1508760"/>
+            <a:ext cx="3383280" cy="4389120"/>
+          </a:xfrm>
+          <a:prstGeom prst="rect">
+            <a:avLst/>
+          </a:prstGeom>
+          <a:noFill/>
+          <a:ln/>
+        </p:spPr>
+        <p:txBody>
+          <a:bodyPr wrap="square" lIns="0" tIns="0" rIns="0" bIns="0" rtlCol="0" anchor="t"/>
           <a:lstStyle/>
           <a:p>
             <a:pPr indent="0" marL="0">
               <a:buNone/>
             </a:pPr>
             <a:r>
-              <a:rPr lang="en-US" sz="2000" b="1" dirty="0">
-                <a:solidFill>
-                  <a:srgbClr val="1F2A4A"/>
-                </a:solidFill>
-              </a:rPr>
-              <a:t>① 반 명단 엑셀</a:t>
-            </a:r>
-            <a:endParaRPr lang="en-US" sz="2000" dirty="0"/>
-          </a:p>
-        </p:txBody>
-      </p:sp>
-      <p:sp>
-        <p:nvSpPr>
-          <p:cNvPr id="7" name="Text 5"/>
-          <p:cNvSpPr txBox="1"/>
-          <p:nvPr/>
-        </p:nvSpPr>
-        <p:spPr>
-          <a:xfrm>
-            <a:off x="822960" y="2011680"/>
-            <a:ext cx="3749040" cy="640080"/>
-          </a:xfrm>
-          <a:prstGeom prst="rect">
-            <a:avLst/>
-          </a:prstGeom>
-          <a:noFill/>
-          <a:ln/>
-        </p:spPr>
-        <p:txBody>
-          <a:bodyPr wrap="square" lIns="0" tIns="0" rIns="0" bIns="0" rtlCol="0" anchor="t"/>
-          <a:lstStyle/>
+              <a:rPr lang="en-US" sz="1500" b="1" dirty="0">
+                <a:solidFill>
+                  <a:srgbClr val="2B3550"/>
+                </a:solidFill>
+              </a:rPr>
+              <a:t>팀 이름으로 적었다면</a:t>
+            </a:r>
+            <a:endParaRPr lang="en-US" sz="1500" dirty="0"/>
+          </a:p>
           <a:p>
             <a:pPr indent="0" marL="0">
               <a:buNone/>
@@ -4804,321 +5163,37 @@
                   <a:srgbClr val="2B3550"/>
                 </a:solidFill>
               </a:rPr>
-              <a:t>수업계획서 탭에서 이미 올렸다면 따로 올리지 않아도 돼요.</a:t>
+              <a:t>'인원' 칸에 학생 수를 적어 주세요. 숙제 안내문 장 수가 자동으로 맞춰져요.</a:t>
             </a:r>
             <a:endParaRPr lang="en-US" sz="1500" dirty="0"/>
           </a:p>
-        </p:txBody>
-      </p:sp>
-      <p:sp>
-        <p:nvSpPr>
-          <p:cNvPr id="8" name="Shape 6"/>
-          <p:cNvSpPr/>
-          <p:nvPr/>
-        </p:nvSpPr>
-        <p:spPr>
-          <a:xfrm>
-            <a:off x="822960" y="2788920"/>
-            <a:ext cx="3657600" cy="1828800"/>
-          </a:xfrm>
-          <a:prstGeom prst="roundRect">
-            <a:avLst>
-              <a:gd name="adj" fmla="val 5000"/>
-            </a:avLst>
-          </a:prstGeom>
-          <a:solidFill>
-            <a:srgbClr val="FFF4D6"/>
-          </a:solidFill>
-          <a:ln w="12700">
-            <a:solidFill>
-              <a:srgbClr val="E9D9A6"/>
-            </a:solidFill>
-            <a:prstDash val="solid"/>
-          </a:ln>
-        </p:spPr>
-      </p:sp>
-      <p:sp>
-        <p:nvSpPr>
-          <p:cNvPr id="9" name="Text 7"/>
-          <p:cNvSpPr txBox="1"/>
-          <p:nvPr/>
-        </p:nvSpPr>
-        <p:spPr>
-          <a:xfrm>
-            <a:off x="1005840" y="2880360"/>
-            <a:ext cx="3337560" cy="1645920"/>
-          </a:xfrm>
-          <a:prstGeom prst="rect">
-            <a:avLst/>
-          </a:prstGeom>
-          <a:noFill/>
-          <a:ln/>
-        </p:spPr>
-        <p:txBody>
-          <a:bodyPr wrap="square" lIns="0" tIns="0" rIns="0" bIns="0" rtlCol="0" anchor="t"/>
-          <a:lstStyle/>
           <a:p>
             <a:pPr indent="0" marL="0">
               <a:buNone/>
             </a:pPr>
             <a:r>
-              <a:rPr lang="en-US" sz="1400" b="1" dirty="0">
+              <a:rPr lang="en-US" sz="1500" dirty="0">
                 <a:solidFill>
                   <a:srgbClr val="2B3550"/>
                 </a:solidFill>
               </a:rPr>
-              <a:t>팀 이름으로 적었다면</a:t>
-            </a:r>
-            <a:endParaRPr lang="en-US" sz="1400" dirty="0"/>
+              <a:t> </a:t>
+            </a:r>
+            <a:endParaRPr lang="en-US" sz="1500" dirty="0"/>
           </a:p>
           <a:p>
             <a:pPr indent="0" marL="0">
               <a:buNone/>
             </a:pPr>
             <a:r>
-              <a:rPr lang="en-US" sz="1400" dirty="0">
-                <a:solidFill>
-                  <a:srgbClr val="2B3550"/>
-                </a:solidFill>
-              </a:rPr>
-              <a:t>'인원' 칸을 만들어 학생 수를 적어 주세요. 숙제 안내문 장 수가 자동으로 맞춰져요.</a:t>
-            </a:r>
-            <a:endParaRPr lang="en-US" sz="1400" dirty="0"/>
-          </a:p>
-        </p:txBody>
-      </p:sp>
-      <p:sp>
-        <p:nvSpPr>
-          <p:cNvPr id="10" name="Text 8"/>
-          <p:cNvSpPr txBox="1"/>
-          <p:nvPr/>
-        </p:nvSpPr>
-        <p:spPr>
-          <a:xfrm>
-            <a:off x="822960" y="4846320"/>
-            <a:ext cx="3749040" cy="411480"/>
-          </a:xfrm>
-          <a:prstGeom prst="rect">
-            <a:avLst/>
-          </a:prstGeom>
-          <a:noFill/>
-          <a:ln/>
-        </p:spPr>
-        <p:txBody>
-          <a:bodyPr wrap="square" lIns="0" tIns="0" rIns="0" bIns="0" rtlCol="0" anchor="ctr"/>
-          <a:lstStyle/>
-          <a:p>
-            <a:pPr indent="0" marL="0">
-              <a:buNone/>
-            </a:pPr>
-            <a:r>
-              <a:rPr lang="en-US" sz="1300" dirty="0">
+              <a:rPr lang="en-US" sz="1500" dirty="0">
                 <a:solidFill>
                   <a:srgbClr val="5B6680"/>
                 </a:solidFill>
               </a:rPr>
               <a:t>예) 이름: 목요일 1팀 → 인원: 3</a:t>
             </a:r>
-            <a:endParaRPr lang="en-US" sz="1300" dirty="0"/>
-          </a:p>
-        </p:txBody>
-      </p:sp>
-      <p:sp>
-        <p:nvSpPr>
-          <p:cNvPr id="11" name="card"/>
-          <p:cNvSpPr/>
-          <p:nvPr/>
-        </p:nvSpPr>
-        <p:spPr>
-          <a:xfrm>
-            <a:off x="5029200" y="1280160"/>
-            <a:ext cx="6583680" cy="4892040"/>
-          </a:xfrm>
-          <a:prstGeom prst="roundRect">
-            <a:avLst>
-              <a:gd name="adj" fmla="val 2617"/>
-            </a:avLst>
-          </a:prstGeom>
-          <a:solidFill>
-            <a:srgbClr val="FFFFFF"/>
-          </a:solidFill>
-          <a:ln w="9525">
-            <a:solidFill>
-              <a:srgbClr val="DDE2EA"/>
-            </a:solidFill>
-            <a:prstDash val="solid"/>
-          </a:ln>
-        </p:spPr>
-      </p:sp>
-      <p:sp>
-        <p:nvSpPr>
-          <p:cNvPr id="12" name="Text 10"/>
-          <p:cNvSpPr txBox="1"/>
-          <p:nvPr/>
-        </p:nvSpPr>
-        <p:spPr>
-          <a:xfrm>
-            <a:off x="5303520" y="1508760"/>
-            <a:ext cx="3657600" cy="457200"/>
-          </a:xfrm>
-          <a:prstGeom prst="rect">
-            <a:avLst/>
-          </a:prstGeom>
-          <a:noFill/>
-          <a:ln/>
-        </p:spPr>
-        <p:txBody>
-          <a:bodyPr wrap="square" lIns="0" tIns="0" rIns="0" bIns="0" rtlCol="0" anchor="ctr"/>
-          <a:lstStyle/>
-          <a:p>
-            <a:pPr indent="0" marL="0">
-              <a:buNone/>
-            </a:pPr>
-            <a:r>
-              <a:rPr lang="en-US" sz="2000" b="1" dirty="0">
-                <a:solidFill>
-                  <a:srgbClr val="E07A3F"/>
-                </a:solidFill>
-              </a:rPr>
-              <a:t>② 숙제 엑셀</a:t>
-            </a:r>
-            <a:endParaRPr lang="en-US" sz="2000" dirty="0"/>
-          </a:p>
-        </p:txBody>
-      </p:sp>
-      <p:pic>
-        <p:nvPicPr>
-          <p:cNvPr id="13" name="Image 0" descr="숙제 엑셀 예시">    </p:cNvPr>
-          <p:cNvPicPr>
-            <a:picLocks noChangeAspect="1"/>
-          </p:cNvPicPr>
-          <p:nvPr/>
-        </p:nvPicPr>
-        <p:blipFill>
-          <a:blip r:embed="rId1"/>
-          <a:stretch>
-            <a:fillRect/>
-          </a:stretch>
-        </p:blipFill>
-        <p:spPr>
-          <a:xfrm>
-            <a:off x="5303520" y="2057400"/>
-            <a:ext cx="3200400" cy="2426572"/>
-          </a:xfrm>
-          <a:prstGeom prst="rect">
-            <a:avLst/>
-          </a:prstGeom>
-        </p:spPr>
-      </p:pic>
-      <p:sp>
-        <p:nvSpPr>
-          <p:cNvPr id="14" name="Text 11"/>
-          <p:cNvSpPr txBox="1"/>
-          <p:nvPr/>
-        </p:nvSpPr>
-        <p:spPr>
-          <a:xfrm>
-            <a:off x="8686800" y="2057400"/>
-            <a:ext cx="2743200" cy="3840480"/>
-          </a:xfrm>
-          <a:prstGeom prst="rect">
-            <a:avLst/>
-          </a:prstGeom>
-          <a:noFill/>
-          <a:ln/>
-        </p:spPr>
-        <p:txBody>
-          <a:bodyPr wrap="square" lIns="0" tIns="0" rIns="0" bIns="0" rtlCol="0" anchor="t"/>
-          <a:lstStyle/>
-          <a:p>
-            <a:pPr marL="342900" indent="-342900">
-              <a:spcAft>
-                <a:spcPts val="800"/>
-              </a:spcAft>
-              <a:buSzPct val="100000"/>
-              <a:buChar char="•"/>
-            </a:pPr>
-            <a:r>
-              <a:rPr lang="en-US" sz="1300" dirty="0">
-                <a:solidFill>
-                  <a:srgbClr val="2B3550"/>
-                </a:solidFill>
-              </a:rPr>
-              <a:t>첫 줄: No 단계 차시 숙제</a:t>
-            </a:r>
-            <a:endParaRPr lang="en-US" sz="1300" dirty="0"/>
-          </a:p>
-          <a:p>
-            <a:pPr marL="342900" indent="-342900">
-              <a:spcAft>
-                <a:spcPts val="800"/>
-              </a:spcAft>
-              <a:buSzPct val="100000"/>
-              <a:buChar char="•"/>
-            </a:pPr>
-            <a:r>
-              <a:rPr lang="en-US" sz="1300" dirty="0">
-                <a:solidFill>
-                  <a:srgbClr val="2B3550"/>
-                </a:solidFill>
-              </a:rPr>
-              <a:t>같은 단계는 단계 칸을 합쳐요</a:t>
-            </a:r>
-            <a:endParaRPr lang="en-US" sz="1300" dirty="0"/>
-          </a:p>
-          <a:p>
-            <a:pPr marL="342900" indent="-342900">
-              <a:spcAft>
-                <a:spcPts val="800"/>
-              </a:spcAft>
-              <a:buSzPct val="100000"/>
-              <a:buChar char="•"/>
-            </a:pPr>
-            <a:r>
-              <a:rPr lang="en-US" sz="1300" dirty="0">
-                <a:solidFill>
-                  <a:srgbClr val="2B3550"/>
-                </a:solidFill>
-              </a:rPr>
-              <a:t>필독서는 비워도 자동으로 들어가요</a:t>
-            </a:r>
-            <a:endParaRPr lang="en-US" sz="1300" dirty="0"/>
-          </a:p>
-          <a:p>
-            <a:pPr marL="342900" indent="-342900">
-              <a:spcAft>
-                <a:spcPts val="800"/>
-              </a:spcAft>
-              <a:buSzPct val="100000"/>
-              <a:buChar char="•"/>
-            </a:pPr>
-            <a:r>
-              <a:rPr lang="en-US" sz="1300" dirty="0">
-                <a:solidFill>
-                  <a:srgbClr val="2B3550"/>
-                </a:solidFill>
-              </a:rPr>
-              <a:t>'1.' '①'로 시작하는 줄이 숙제 한 개, 번호 없는 줄은 덧붙임 글이에요</a:t>
-            </a:r>
-            <a:endParaRPr lang="en-US" sz="1300" dirty="0"/>
-          </a:p>
-          <a:p>
-            <a:pPr marL="342900" indent="-342900">
-              <a:spcAft>
-                <a:spcPts val="800"/>
-              </a:spcAft>
-              <a:buSzPct val="100000"/>
-              <a:buChar char="•"/>
-            </a:pPr>
-            <a:r>
-              <a:rPr lang="en-US" sz="1300" dirty="0">
-                <a:solidFill>
-                  <a:srgbClr val="2B3550"/>
-                </a:solidFill>
-              </a:rPr>
-              <a:t>호 과정은 호수까지 적어요</a:t>
-            </a:r>
-            <a:endParaRPr lang="en-US" sz="1300" dirty="0"/>
+            <a:endParaRPr lang="en-US" sz="1500" dirty="0"/>
           </a:p>
         </p:txBody>
       </p:sp>
@@ -5224,7 +5299,7 @@
                   <a:schemeClr val="tx2"/>
                 </a:solidFill>
               </a:rPr>
-              <a:t>숙제 안내문 탭에서 숙제 엑셀을 올려요</a:t>
+              <a:t>숙제는 화면에 바로 적어요</a:t>
             </a:r>
             <a:endParaRPr lang="en-US" sz="3000" dirty="0"/>
           </a:p>
@@ -5302,11 +5377,11 @@
         <p:spPr>
           <a:xfrm>
             <a:off x="658368" y="1298448"/>
-            <a:ext cx="2446126" cy="4855464"/>
+            <a:ext cx="2190682" cy="4855464"/>
           </a:xfrm>
           <a:prstGeom prst="roundRect">
             <a:avLst>
-              <a:gd name="adj" fmla="val 4486"/>
+              <a:gd name="adj" fmla="val 5009"/>
             </a:avLst>
           </a:prstGeom>
           <a:solidFill>
@@ -5329,7 +5404,7 @@
       </p:sp>
       <p:pic>
         <p:nvPicPr>
-          <p:cNvPr id="6" name="Image 0" descr="반 명단이 들어온 숙제 안내문 탭">    </p:cNvPr>
+          <p:cNvPr id="6" name="Image 0" descr="숙제 적기 화면">    </p:cNvPr>
           <p:cNvPicPr>
             <a:picLocks noChangeAspect="1"/>
           </p:cNvPicPr>
@@ -5344,7 +5419,7 @@
         <p:spPr>
           <a:xfrm>
             <a:off x="731520" y="1371600"/>
-            <a:ext cx="2299822" cy="4709160"/>
+            <a:ext cx="2044378" cy="4709160"/>
           </a:xfrm>
           <a:prstGeom prst="rect">
             <a:avLst/>
@@ -5359,7 +5434,7 @@
         </p:nvSpPr>
         <p:spPr>
           <a:xfrm>
-            <a:off x="3840480" y="1481328"/>
+            <a:off x="4114800" y="1481328"/>
             <a:ext cx="384048" cy="384048"/>
           </a:xfrm>
           <a:prstGeom prst="ellipse">
@@ -5384,7 +5459,7 @@
         </p:nvSpPr>
         <p:spPr>
           <a:xfrm>
-            <a:off x="3840480" y="1481328"/>
+            <a:off x="4114800" y="1481328"/>
             <a:ext cx="384048" cy="384048"/>
           </a:xfrm>
           <a:prstGeom prst="rect">
@@ -5420,8 +5495,8 @@
         </p:nvSpPr>
         <p:spPr>
           <a:xfrm>
-            <a:off x="4389120" y="1426464"/>
-            <a:ext cx="7132320" cy="1252728"/>
+            <a:off x="4663440" y="1426464"/>
+            <a:ext cx="3383280" cy="1097280"/>
           </a:xfrm>
           <a:prstGeom prst="rect">
             <a:avLst/>
@@ -5440,14 +5515,14 @@
               <a:buNone/>
             </a:pPr>
             <a:r>
-              <a:rPr lang="en-US" sz="1800" b="1" dirty="0">
+              <a:rPr lang="en-US" sz="1500" b="1" dirty="0">
                 <a:solidFill>
                   <a:srgbClr val="2B3550"/>
                 </a:solidFill>
               </a:rPr>
-              <a:t>반 명단 칸에 초록색 파일 이름이 보여요</a:t>
-            </a:r>
-            <a:endParaRPr lang="en-US" sz="1800" dirty="0"/>
+              <a:t>우리 반 과정만 차시별로 나와요</a:t>
+            </a:r>
+            <a:endParaRPr lang="en-US" sz="1500" dirty="0"/>
           </a:p>
           <a:p>
             <a:pPr indent="0" marL="0">
@@ -5457,14 +5532,14 @@
               <a:buNone/>
             </a:pPr>
             <a:r>
-              <a:rPr lang="en-US" sz="1500" dirty="0">
+              <a:rPr lang="en-US" sz="1200" dirty="0">
                 <a:solidFill>
                   <a:srgbClr val="5B6680"/>
                 </a:solidFill>
               </a:rPr>
-              <a:t>수업계획서 탭에서 올린 명단이 이미 들어와 있어요</a:t>
-            </a:r>
-            <a:endParaRPr lang="en-US" sz="1800" dirty="0"/>
+              <a:t>차시 옆에 그날 필독서가 보여요</a:t>
+            </a:r>
+            <a:endParaRPr lang="en-US" sz="1500" dirty="0"/>
           </a:p>
         </p:txBody>
       </p:sp>
@@ -5476,7 +5551,7 @@
         </p:nvSpPr>
         <p:spPr>
           <a:xfrm>
-            <a:off x="3840480" y="2807208"/>
+            <a:off x="4114800" y="2651760"/>
             <a:ext cx="384048" cy="384048"/>
           </a:xfrm>
           <a:prstGeom prst="ellipse">
@@ -5501,7 +5576,7 @@
         </p:nvSpPr>
         <p:spPr>
           <a:xfrm>
-            <a:off x="3840480" y="2807208"/>
+            <a:off x="4114800" y="2651760"/>
             <a:ext cx="384048" cy="384048"/>
           </a:xfrm>
           <a:prstGeom prst="rect">
@@ -5537,8 +5612,8 @@
         </p:nvSpPr>
         <p:spPr>
           <a:xfrm>
-            <a:off x="4389120" y="2752344"/>
-            <a:ext cx="7132320" cy="1252728"/>
+            <a:off x="4663440" y="2596896"/>
+            <a:ext cx="3383280" cy="1097280"/>
           </a:xfrm>
           <a:prstGeom prst="rect">
             <a:avLst/>
@@ -5557,14 +5632,31 @@
               <a:buNone/>
             </a:pPr>
             <a:r>
-              <a:rPr lang="en-US" sz="1800" b="1" dirty="0">
+              <a:rPr lang="en-US" sz="1500" b="1" dirty="0">
                 <a:solidFill>
                   <a:srgbClr val="2B3550"/>
                 </a:solidFill>
               </a:rPr>
-              <a:t>'숙제 엑셀' 칸을 눌러 파일을 골라요</a:t>
-            </a:r>
-            <a:endParaRPr lang="en-US" sz="1800" dirty="0"/>
+              <a:t>자주 쓰는 숙제 버튼을 누르면 칸에 들어가요</a:t>
+            </a:r>
+            <a:endParaRPr lang="en-US" sz="1500" dirty="0"/>
+          </a:p>
+          <a:p>
+            <a:pPr indent="0" marL="0">
+              <a:spcAft>
+                <a:spcPts val="200"/>
+              </a:spcAft>
+              <a:buNone/>
+            </a:pPr>
+            <a:r>
+              <a:rPr lang="en-US" sz="1200" dirty="0">
+                <a:solidFill>
+                  <a:srgbClr val="5B6680"/>
+                </a:solidFill>
+              </a:rPr>
+              <a:t>'1.' '①'로 시작하는 줄이 숙제 한 개, 번호 없는 줄은 덧붙임 글이에요</a:t>
+            </a:r>
+            <a:endParaRPr lang="en-US" sz="1500" dirty="0"/>
           </a:p>
         </p:txBody>
       </p:sp>
@@ -5576,7 +5668,7 @@
         </p:nvSpPr>
         <p:spPr>
           <a:xfrm>
-            <a:off x="3840480" y="4133088"/>
+            <a:off x="4114800" y="3822192"/>
             <a:ext cx="384048" cy="384048"/>
           </a:xfrm>
           <a:prstGeom prst="ellipse">
@@ -5601,7 +5693,7 @@
         </p:nvSpPr>
         <p:spPr>
           <a:xfrm>
-            <a:off x="3840480" y="4133088"/>
+            <a:off x="4114800" y="3822192"/>
             <a:ext cx="384048" cy="384048"/>
           </a:xfrm>
           <a:prstGeom prst="rect">
@@ -5637,8 +5729,8 @@
         </p:nvSpPr>
         <p:spPr>
           <a:xfrm>
-            <a:off x="4389120" y="4078224"/>
-            <a:ext cx="7132320" cy="1252728"/>
+            <a:off x="4663440" y="3767328"/>
+            <a:ext cx="3383280" cy="1097280"/>
           </a:xfrm>
           <a:prstGeom prst="rect">
             <a:avLst/>
@@ -5657,14 +5749,14 @@
               <a:buNone/>
             </a:pPr>
             <a:r>
-              <a:rPr lang="en-US" sz="1800" b="1" dirty="0">
+              <a:rPr lang="en-US" sz="1500" b="1" dirty="0">
                 <a:solidFill>
                   <a:srgbClr val="2B3550"/>
                 </a:solidFill>
               </a:rPr>
-              <a:t>아래에 반별 안내문이 바로 나와요</a:t>
-            </a:r>
-            <a:endParaRPr lang="en-US" sz="1800" dirty="0"/>
+              <a:t>같은 과정을 듣는 반에는 모두 들어가요</a:t>
+            </a:r>
+            <a:endParaRPr lang="en-US" sz="1500" dirty="0"/>
           </a:p>
           <a:p>
             <a:pPr indent="0" marL="0">
@@ -5674,14 +5766,208 @@
               <a:buNone/>
             </a:pPr>
             <a:r>
-              <a:rPr lang="en-US" sz="1500" dirty="0">
+              <a:rPr lang="en-US" sz="1200" dirty="0">
                 <a:solidFill>
                   <a:srgbClr val="5B6680"/>
                 </a:solidFill>
               </a:rPr>
-              <a:t>반 명단이 비어 있으면 여기서 같이 올려도 돼요</a:t>
-            </a:r>
-            <a:endParaRPr lang="en-US" sz="1800" dirty="0"/>
+              <a:t>10월 반과 11월 반은 '독서리더1 (10월)'처럼 따로 적어요</a:t>
+            </a:r>
+            <a:endParaRPr lang="en-US" sz="1500" dirty="0"/>
+          </a:p>
+        </p:txBody>
+      </p:sp>
+      <p:sp>
+        <p:nvSpPr>
+          <p:cNvPr id="16" name="num4"/>
+          <p:cNvSpPr/>
+          <p:nvPr/>
+        </p:nvSpPr>
+        <p:spPr>
+          <a:xfrm>
+            <a:off x="4114800" y="4992624"/>
+            <a:ext cx="384048" cy="384048"/>
+          </a:xfrm>
+          <a:prstGeom prst="ellipse">
+            <a:avLst/>
+          </a:prstGeom>
+          <a:solidFill>
+            <a:srgbClr val="E07A3F"/>
+          </a:solidFill>
+          <a:ln w="12700">
+            <a:solidFill>
+              <a:srgbClr val="E07A3F"/>
+            </a:solidFill>
+            <a:prstDash val="solid"/>
+          </a:ln>
+        </p:spPr>
+      </p:sp>
+      <p:sp>
+        <p:nvSpPr>
+          <p:cNvPr id="17" name="Text 14"/>
+          <p:cNvSpPr txBox="1"/>
+          <p:nvPr/>
+        </p:nvSpPr>
+        <p:spPr>
+          <a:xfrm>
+            <a:off x="4114800" y="4992624"/>
+            <a:ext cx="384048" cy="384048"/>
+          </a:xfrm>
+          <a:prstGeom prst="rect">
+            <a:avLst/>
+          </a:prstGeom>
+          <a:noFill/>
+          <a:ln/>
+        </p:spPr>
+        <p:txBody>
+          <a:bodyPr wrap="square" lIns="0" tIns="0" rIns="0" bIns="0" rtlCol="0" anchor="ctr"/>
+          <a:lstStyle/>
+          <a:p>
+            <a:pPr algn="ctr" indent="0" marL="0">
+              <a:buNone/>
+            </a:pPr>
+            <a:r>
+              <a:rPr lang="en-US" sz="1600" b="1" dirty="0">
+                <a:solidFill>
+                  <a:srgbClr val="FFFFFF"/>
+                </a:solidFill>
+              </a:rPr>
+              <a:t>4</a:t>
+            </a:r>
+            <a:endParaRPr lang="en-US" sz="1600" dirty="0"/>
+          </a:p>
+        </p:txBody>
+      </p:sp>
+      <p:sp>
+        <p:nvSpPr>
+          <p:cNvPr id="18" name="Text 15"/>
+          <p:cNvSpPr txBox="1"/>
+          <p:nvPr/>
+        </p:nvSpPr>
+        <p:spPr>
+          <a:xfrm>
+            <a:off x="4663440" y="4937760"/>
+            <a:ext cx="3383280" cy="1097280"/>
+          </a:xfrm>
+          <a:prstGeom prst="rect">
+            <a:avLst/>
+          </a:prstGeom>
+          <a:noFill/>
+          <a:ln/>
+        </p:spPr>
+        <p:txBody>
+          <a:bodyPr wrap="square" lIns="0" tIns="0" rIns="0" bIns="0" rtlCol="0" anchor="t"/>
+          <a:lstStyle/>
+          <a:p>
+            <a:pPr indent="0" marL="0">
+              <a:spcAft>
+                <a:spcPts val="200"/>
+              </a:spcAft>
+              <a:buNone/>
+            </a:pPr>
+            <a:r>
+              <a:rPr lang="en-US" sz="1500" b="1" dirty="0">
+                <a:solidFill>
+                  <a:srgbClr val="2B3550"/>
+                </a:solidFill>
+              </a:rPr>
+              <a:t>적은 숙제는 이 기기에 남아요</a:t>
+            </a:r>
+            <a:endParaRPr lang="en-US" sz="1500" dirty="0"/>
+          </a:p>
+          <a:p>
+            <a:pPr indent="0" marL="0">
+              <a:spcAft>
+                <a:spcPts val="200"/>
+              </a:spcAft>
+              <a:buNone/>
+            </a:pPr>
+            <a:r>
+              <a:rPr lang="en-US" sz="1200" dirty="0">
+                <a:solidFill>
+                  <a:srgbClr val="5B6680"/>
+                </a:solidFill>
+              </a:rPr>
+              <a:t>다음에 열어도 그대로예요</a:t>
+            </a:r>
+            <a:endParaRPr lang="en-US" sz="1500" dirty="0"/>
+          </a:p>
+        </p:txBody>
+      </p:sp>
+      <p:sp>
+        <p:nvSpPr>
+          <p:cNvPr id="19" name="card"/>
+          <p:cNvSpPr/>
+          <p:nvPr/>
+        </p:nvSpPr>
+        <p:spPr>
+          <a:xfrm>
+            <a:off x="8321040" y="1280160"/>
+            <a:ext cx="3291840" cy="4892040"/>
+          </a:xfrm>
+          <a:prstGeom prst="roundRect">
+            <a:avLst>
+              <a:gd name="adj" fmla="val 3889"/>
+            </a:avLst>
+          </a:prstGeom>
+          <a:solidFill>
+            <a:srgbClr val="EAF1FC"/>
+          </a:solidFill>
+          <a:ln w="9525">
+            <a:solidFill>
+              <a:srgbClr val="DDE2EA"/>
+            </a:solidFill>
+            <a:prstDash val="solid"/>
+          </a:ln>
+        </p:spPr>
+      </p:sp>
+      <p:sp>
+        <p:nvSpPr>
+          <p:cNvPr id="20" name="Text 17"/>
+          <p:cNvSpPr txBox="1"/>
+          <p:nvPr/>
+        </p:nvSpPr>
+        <p:spPr>
+          <a:xfrm>
+            <a:off x="8549640" y="1508760"/>
+            <a:ext cx="2880360" cy="4389120"/>
+          </a:xfrm>
+          <a:prstGeom prst="rect">
+            <a:avLst/>
+          </a:prstGeom>
+          <a:noFill/>
+          <a:ln/>
+        </p:spPr>
+        <p:txBody>
+          <a:bodyPr wrap="square" lIns="0" tIns="0" rIns="0" bIns="0" rtlCol="0" anchor="t"/>
+          <a:lstStyle/>
+          <a:p>
+            <a:pPr indent="0" marL="0">
+              <a:buNone/>
+            </a:pPr>
+            <a:r>
+              <a:rPr lang="en-US" sz="1400" b="1" dirty="0">
+                <a:solidFill>
+                  <a:srgbClr val="1F2A4A"/>
+                </a:solidFill>
+              </a:rPr>
+              <a:t>엑셀이 편하다면</a:t>
+            </a:r>
+            <a:endParaRPr lang="en-US" sz="1400" dirty="0"/>
+          </a:p>
+          <a:p>
+            <a:pPr indent="0" marL="0">
+              <a:buNone/>
+            </a:pPr>
+            <a:r>
+              <a:rPr lang="en-US" sz="1400" dirty="0">
+                <a:solidFill>
+                  <a:srgbClr val="1F2A4A"/>
+                </a:solidFill>
+              </a:rPr>
+              <a:t>'숙제 엑셀 양식 받기'를 누르면 우리 반 과정·차시·필독서가 미리 들어간 엑셀이 나와요. 숙제 칸만 채워 1단계 '숙제 엑셀'에 올리면 돼요.</a:t>
+            </a:r>
+            <a:endParaRPr lang="en-US" sz="1400" dirty="0"/>
           </a:p>
         </p:txBody>
       </p:sp>
@@ -5865,11 +6151,11 @@
         <p:spPr>
           <a:xfrm>
             <a:off x="658368" y="1298448"/>
-            <a:ext cx="3379361" cy="2889504"/>
+            <a:ext cx="3398538" cy="4855464"/>
           </a:xfrm>
           <a:prstGeom prst="roundRect">
             <a:avLst>
-              <a:gd name="adj" fmla="val 3797"/>
+              <a:gd name="adj" fmla="val 3229"/>
             </a:avLst>
           </a:prstGeom>
           <a:solidFill>
@@ -5892,7 +6178,7 @@
       </p:sp>
       <p:pic>
         <p:nvPicPr>
-          <p:cNvPr id="6" name="Image 0" descr="페이지 화면">    </p:cNvPr>
+          <p:cNvPr id="6" name="Image 0" descr="반별 숙제 안내문 확인">    </p:cNvPr>
           <p:cNvPicPr>
             <a:picLocks noChangeAspect="1"/>
           </p:cNvPicPr>
@@ -5907,7 +6193,7 @@
         <p:spPr>
           <a:xfrm>
             <a:off x="731520" y="1371600"/>
-            <a:ext cx="3233057" cy="2743200"/>
+            <a:ext cx="3252234" cy="4709160"/>
           </a:xfrm>
           <a:prstGeom prst="rect">
             <a:avLst/>
@@ -5916,71 +6202,13 @@
       </p:pic>
       <p:sp>
         <p:nvSpPr>
-          <p:cNvPr id="7" name="Shape 4"/>
+          <p:cNvPr id="7" name="num1"/>
           <p:cNvSpPr/>
           <p:nvPr/>
         </p:nvSpPr>
         <p:spPr>
           <a:xfrm>
-            <a:off x="4211465" y="1298448"/>
-            <a:ext cx="3383852" cy="4855464"/>
-          </a:xfrm>
-          <a:prstGeom prst="roundRect">
-            <a:avLst>
-              <a:gd name="adj" fmla="val 3243"/>
-            </a:avLst>
-          </a:prstGeom>
-          <a:solidFill>
-            <a:srgbClr val="FFFFFF"/>
-          </a:solidFill>
-          <a:ln w="12700">
-            <a:solidFill>
-              <a:srgbClr val="C9D0DC"/>
-            </a:solidFill>
-            <a:prstDash val="solid"/>
-          </a:ln>
-          <a:effectLst>
-            <a:outerShdw sx="100000" sy="100000" kx="0" ky="0" algn="bl" rotWithShape="0" blurRad="101600" dist="38100" dir="5400000">
-              <a:srgbClr val="1F2A4A">
-                <a:alpha val="18000"/>
-              </a:srgbClr>
-            </a:outerShdw>
-          </a:effectLst>
-        </p:spPr>
-      </p:sp>
-      <p:pic>
-        <p:nvPicPr>
-          <p:cNvPr id="8" name="Image 1" descr="페이지 화면">    </p:cNvPr>
-          <p:cNvPicPr>
-            <a:picLocks noChangeAspect="1"/>
-          </p:cNvPicPr>
-          <p:nvPr/>
-        </p:nvPicPr>
-        <p:blipFill>
-          <a:blip r:embed="rId2"/>
-          <a:stretch>
-            <a:fillRect/>
-          </a:stretch>
-        </p:blipFill>
-        <p:spPr>
-          <a:xfrm>
-            <a:off x="4284617" y="1371600"/>
-            <a:ext cx="3237548" cy="4709160"/>
-          </a:xfrm>
-          <a:prstGeom prst="rect">
-            <a:avLst/>
-          </a:prstGeom>
-        </p:spPr>
-      </p:pic>
-      <p:sp>
-        <p:nvSpPr>
-          <p:cNvPr id="9" name="num1"/>
-          <p:cNvSpPr/>
-          <p:nvPr/>
-        </p:nvSpPr>
-        <p:spPr>
-          <a:xfrm>
-            <a:off x="7909560" y="1481328"/>
+            <a:off x="4343400" y="1481328"/>
             <a:ext cx="384048" cy="384048"/>
           </a:xfrm>
           <a:prstGeom prst="ellipse">
@@ -5999,13 +6227,13 @@
       </p:sp>
       <p:sp>
         <p:nvSpPr>
-          <p:cNvPr id="10" name="Text 6"/>
-          <p:cNvSpPr txBox="1"/>
-          <p:nvPr/>
-        </p:nvSpPr>
-        <p:spPr>
-          <a:xfrm>
-            <a:off x="7909560" y="1481328"/>
+          <p:cNvPr id="8" name="Text 5"/>
+          <p:cNvSpPr txBox="1"/>
+          <p:nvPr/>
+        </p:nvSpPr>
+        <p:spPr>
+          <a:xfrm>
+            <a:off x="4343400" y="1481328"/>
             <a:ext cx="384048" cy="384048"/>
           </a:xfrm>
           <a:prstGeom prst="rect">
@@ -6035,14 +6263,14 @@
       </p:sp>
       <p:sp>
         <p:nvSpPr>
-          <p:cNvPr id="11" name="Text 7"/>
-          <p:cNvSpPr txBox="1"/>
-          <p:nvPr/>
-        </p:nvSpPr>
-        <p:spPr>
-          <a:xfrm>
-            <a:off x="8458200" y="1426464"/>
-            <a:ext cx="3154680" cy="1115568"/>
+          <p:cNvPr id="9" name="Text 6"/>
+          <p:cNvSpPr txBox="1"/>
+          <p:nvPr/>
+        </p:nvSpPr>
+        <p:spPr>
+          <a:xfrm>
+            <a:off x="4892040" y="1426464"/>
+            <a:ext cx="3200400" cy="1161288"/>
           </a:xfrm>
           <a:prstGeom prst="rect">
             <a:avLst/>
@@ -6091,13 +6319,13 @@
       </p:sp>
       <p:sp>
         <p:nvSpPr>
-          <p:cNvPr id="12" name="num2"/>
+          <p:cNvPr id="10" name="num2"/>
           <p:cNvSpPr/>
           <p:nvPr/>
         </p:nvSpPr>
         <p:spPr>
           <a:xfrm>
-            <a:off x="7909560" y="2670048"/>
+            <a:off x="4343400" y="2715768"/>
             <a:ext cx="384048" cy="384048"/>
           </a:xfrm>
           <a:prstGeom prst="ellipse">
@@ -6116,13 +6344,13 @@
       </p:sp>
       <p:sp>
         <p:nvSpPr>
-          <p:cNvPr id="13" name="Text 9"/>
-          <p:cNvSpPr txBox="1"/>
-          <p:nvPr/>
-        </p:nvSpPr>
-        <p:spPr>
-          <a:xfrm>
-            <a:off x="7909560" y="2670048"/>
+          <p:cNvPr id="11" name="Text 8"/>
+          <p:cNvSpPr txBox="1"/>
+          <p:nvPr/>
+        </p:nvSpPr>
+        <p:spPr>
+          <a:xfrm>
+            <a:off x="4343400" y="2715768"/>
             <a:ext cx="384048" cy="384048"/>
           </a:xfrm>
           <a:prstGeom prst="rect">
@@ -6152,14 +6380,14 @@
       </p:sp>
       <p:sp>
         <p:nvSpPr>
-          <p:cNvPr id="14" name="Text 10"/>
-          <p:cNvSpPr txBox="1"/>
-          <p:nvPr/>
-        </p:nvSpPr>
-        <p:spPr>
-          <a:xfrm>
-            <a:off x="8458200" y="2615184"/>
-            <a:ext cx="3154680" cy="1115568"/>
+          <p:cNvPr id="12" name="Text 9"/>
+          <p:cNvSpPr txBox="1"/>
+          <p:nvPr/>
+        </p:nvSpPr>
+        <p:spPr>
+          <a:xfrm>
+            <a:off x="4892040" y="2660904"/>
+            <a:ext cx="3200400" cy="1161288"/>
           </a:xfrm>
           <a:prstGeom prst="rect">
             <a:avLst/>
@@ -6191,13 +6419,13 @@
       </p:sp>
       <p:sp>
         <p:nvSpPr>
-          <p:cNvPr id="15" name="num3"/>
+          <p:cNvPr id="13" name="num3"/>
           <p:cNvSpPr/>
           <p:nvPr/>
         </p:nvSpPr>
         <p:spPr>
           <a:xfrm>
-            <a:off x="7909560" y="3858768"/>
+            <a:off x="4343400" y="3950208"/>
             <a:ext cx="384048" cy="384048"/>
           </a:xfrm>
           <a:prstGeom prst="ellipse">
@@ -6216,13 +6444,13 @@
       </p:sp>
       <p:sp>
         <p:nvSpPr>
-          <p:cNvPr id="16" name="Text 12"/>
-          <p:cNvSpPr txBox="1"/>
-          <p:nvPr/>
-        </p:nvSpPr>
-        <p:spPr>
-          <a:xfrm>
-            <a:off x="7909560" y="3858768"/>
+          <p:cNvPr id="14" name="Text 11"/>
+          <p:cNvSpPr txBox="1"/>
+          <p:nvPr/>
+        </p:nvSpPr>
+        <p:spPr>
+          <a:xfrm>
+            <a:off x="4343400" y="3950208"/>
             <a:ext cx="384048" cy="384048"/>
           </a:xfrm>
           <a:prstGeom prst="rect">
@@ -6252,14 +6480,14 @@
       </p:sp>
       <p:sp>
         <p:nvSpPr>
-          <p:cNvPr id="17" name="Text 13"/>
-          <p:cNvSpPr txBox="1"/>
-          <p:nvPr/>
-        </p:nvSpPr>
-        <p:spPr>
-          <a:xfrm>
-            <a:off x="8458200" y="3803904"/>
-            <a:ext cx="3154680" cy="1115568"/>
+          <p:cNvPr id="15" name="Text 12"/>
+          <p:cNvSpPr txBox="1"/>
+          <p:nvPr/>
+        </p:nvSpPr>
+        <p:spPr>
+          <a:xfrm>
+            <a:off x="4892040" y="3895344"/>
+            <a:ext cx="3200400" cy="1161288"/>
           </a:xfrm>
           <a:prstGeom prst="rect">
             <a:avLst/>
@@ -6300,7 +6528,7 @@
                   <a:srgbClr val="5B6680"/>
                 </a:solidFill>
               </a:rPr>
-              <a:t>잘못 고쳤으면 '원래대로'</a:t>
+              <a:t>제목·수업시간·필독서·소주제·숙제를 바로 고칠 수 있어요</a:t>
             </a:r>
             <a:endParaRPr lang="en-US" sz="1700" dirty="0"/>
           </a:p>
@@ -6308,18 +6536,18 @@
       </p:sp>
       <p:sp>
         <p:nvSpPr>
-          <p:cNvPr id="18" name="card"/>
+          <p:cNvPr id="16" name="card"/>
           <p:cNvSpPr/>
           <p:nvPr/>
         </p:nvSpPr>
         <p:spPr>
           <a:xfrm>
-            <a:off x="548640" y="4434840"/>
-            <a:ext cx="3611880" cy="1737360"/>
+            <a:off x="8366760" y="1280160"/>
+            <a:ext cx="3246120" cy="4892040"/>
           </a:xfrm>
           <a:prstGeom prst="roundRect">
             <a:avLst>
-              <a:gd name="adj" fmla="val 7368"/>
+              <a:gd name="adj" fmla="val 3944"/>
             </a:avLst>
           </a:prstGeom>
           <a:solidFill>
@@ -6335,14 +6563,14 @@
       </p:sp>
       <p:sp>
         <p:nvSpPr>
-          <p:cNvPr id="19" name="Text 15"/>
-          <p:cNvSpPr txBox="1"/>
-          <p:nvPr/>
-        </p:nvSpPr>
-        <p:spPr>
-          <a:xfrm>
-            <a:off x="777240" y="4572000"/>
-            <a:ext cx="3200400" cy="1508760"/>
+          <p:cNvPr id="17" name="Text 14"/>
+          <p:cNvSpPr txBox="1"/>
+          <p:nvPr/>
+        </p:nvSpPr>
+        <p:spPr>
+          <a:xfrm>
+            <a:off x="8595360" y="1508760"/>
+            <a:ext cx="2834640" cy="4389120"/>
           </a:xfrm>
           <a:prstGeom prst="rect">
             <a:avLst/>
@@ -6358,28 +6586,28 @@
               <a:buNone/>
             </a:pPr>
             <a:r>
-              <a:rPr lang="en-US" sz="1300" b="1" dirty="0">
+              <a:rPr lang="en-US" sz="1400" b="1" dirty="0">
                 <a:solidFill>
                   <a:srgbClr val="2B3550"/>
                 </a:solidFill>
               </a:rPr>
               <a:t>숙제가 없는 과정은?</a:t>
             </a:r>
-            <a:endParaRPr lang="en-US" sz="1300" dirty="0"/>
+            <a:endParaRPr lang="en-US" sz="1400" dirty="0"/>
           </a:p>
           <a:p>
             <a:pPr indent="0" marL="0">
               <a:buNone/>
             </a:pPr>
             <a:r>
-              <a:rPr lang="en-US" sz="1300" dirty="0">
+              <a:rPr lang="en-US" sz="1400" dirty="0">
                 <a:solidFill>
                   <a:srgbClr val="2B3550"/>
                 </a:solidFill>
               </a:rPr>
-              <a:t>숙제 엑셀에 없는 과정(몰입독서, 어휘, 새싹 등)은 안내문을 만들지 않아요.</a:t>
-            </a:r>
-            <a:endParaRPr lang="en-US" sz="1300" dirty="0"/>
+              <a:t>숙제를 적지 않은 과정(몰입독서, 어휘, 새싹 등)은 안내문을 만들지 않아요.</a:t>
+            </a:r>
+            <a:endParaRPr lang="en-US" sz="1400" dirty="0"/>
           </a:p>
         </p:txBody>
       </p:sp>
@@ -6563,11 +6791,11 @@
         <p:spPr>
           <a:xfrm>
             <a:off x="658368" y="1298448"/>
-            <a:ext cx="3986784" cy="1849743"/>
+            <a:ext cx="3986784" cy="2729720"/>
           </a:xfrm>
           <a:prstGeom prst="roundRect">
             <a:avLst>
-              <a:gd name="adj" fmla="val 5932"/>
+              <a:gd name="adj" fmla="val 4020"/>
             </a:avLst>
           </a:prstGeom>
           <a:solidFill>
@@ -6605,7 +6833,7 @@
         <p:spPr>
           <a:xfrm>
             <a:off x="731520" y="1371600"/>
-            <a:ext cx="3840480" cy="1703439"/>
+            <a:ext cx="3840480" cy="2583416"/>
           </a:xfrm>
           <a:prstGeom prst="rect">
             <a:avLst/>
@@ -6620,7 +6848,7 @@
         </p:nvSpPr>
         <p:spPr>
           <a:xfrm>
-            <a:off x="640080" y="3264408"/>
+            <a:off x="640080" y="4178808"/>
             <a:ext cx="384048" cy="384048"/>
           </a:xfrm>
           <a:prstGeom prst="ellipse">
@@ -6645,7 +6873,7 @@
         </p:nvSpPr>
         <p:spPr>
           <a:xfrm>
-            <a:off x="640080" y="3264408"/>
+            <a:off x="640080" y="4178808"/>
             <a:ext cx="384048" cy="384048"/>
           </a:xfrm>
           <a:prstGeom prst="rect">
@@ -6681,8 +6909,8 @@
         </p:nvSpPr>
         <p:spPr>
           <a:xfrm>
-            <a:off x="1188720" y="3209544"/>
-            <a:ext cx="3566160" cy="932688"/>
+            <a:off x="1188720" y="4123944"/>
+            <a:ext cx="3566160" cy="475488"/>
           </a:xfrm>
           <a:prstGeom prst="rect">
             <a:avLst/>
@@ -6701,14 +6929,14 @@
               <a:buNone/>
             </a:pPr>
             <a:r>
-              <a:rPr lang="en-US" sz="1600" b="1" dirty="0">
+              <a:rPr lang="en-US" sz="1400" b="1" dirty="0">
                 <a:solidFill>
                   <a:srgbClr val="2B3550"/>
                 </a:solidFill>
               </a:rPr>
               <a:t>PDF로 저장</a:t>
             </a:r>
-            <a:endParaRPr lang="en-US" sz="1600" dirty="0"/>
+            <a:endParaRPr lang="en-US" sz="1400" dirty="0"/>
           </a:p>
           <a:p>
             <a:pPr indent="0" marL="0">
@@ -6718,14 +6946,14 @@
               <a:buNone/>
             </a:pPr>
             <a:r>
-              <a:rPr lang="en-US" sz="1300" dirty="0">
+              <a:rPr lang="en-US" sz="1100" dirty="0">
                 <a:solidFill>
                   <a:srgbClr val="5B6680"/>
                 </a:solidFill>
               </a:rPr>
-              <a:t>모든 반이 파일 하나에 들어가요. 한 번에 인쇄해요</a:t>
-            </a:r>
-            <a:endParaRPr lang="en-US" sz="1600" dirty="0"/>
+              <a:t>모든 반이 파일 하나에. 한 번에 인쇄해요</a:t>
+            </a:r>
+            <a:endParaRPr lang="en-US" sz="1400" dirty="0"/>
           </a:p>
         </p:txBody>
       </p:sp>
@@ -6737,7 +6965,7 @@
         </p:nvSpPr>
         <p:spPr>
           <a:xfrm>
-            <a:off x="640080" y="4270248"/>
+            <a:off x="640080" y="4727448"/>
             <a:ext cx="384048" cy="384048"/>
           </a:xfrm>
           <a:prstGeom prst="ellipse">
@@ -6762,7 +6990,7 @@
         </p:nvSpPr>
         <p:spPr>
           <a:xfrm>
-            <a:off x="640080" y="4270248"/>
+            <a:off x="640080" y="4727448"/>
             <a:ext cx="384048" cy="384048"/>
           </a:xfrm>
           <a:prstGeom prst="rect">
@@ -6798,8 +7026,8 @@
         </p:nvSpPr>
         <p:spPr>
           <a:xfrm>
-            <a:off x="1188720" y="4215384"/>
-            <a:ext cx="3566160" cy="932688"/>
+            <a:off x="1188720" y="4672584"/>
+            <a:ext cx="3566160" cy="475488"/>
           </a:xfrm>
           <a:prstGeom prst="rect">
             <a:avLst/>
@@ -6818,14 +7046,14 @@
               <a:buNone/>
             </a:pPr>
             <a:r>
-              <a:rPr lang="en-US" sz="1600" b="1" dirty="0">
+              <a:rPr lang="en-US" sz="1400" b="1" dirty="0">
                 <a:solidFill>
                   <a:srgbClr val="2B3550"/>
                 </a:solidFill>
               </a:rPr>
               <a:t>사진으로 저장</a:t>
             </a:r>
-            <a:endParaRPr lang="en-US" sz="1600" dirty="0"/>
+            <a:endParaRPr lang="en-US" sz="1400" dirty="0"/>
           </a:p>
           <a:p>
             <a:pPr indent="0" marL="0">
@@ -6835,14 +7063,14 @@
               <a:buNone/>
             </a:pPr>
             <a:r>
-              <a:rPr lang="en-US" sz="1300" dirty="0">
+              <a:rPr lang="en-US" sz="1100" dirty="0">
                 <a:solidFill>
                   <a:srgbClr val="5B6680"/>
                 </a:solidFill>
               </a:rPr>
               <a:t>반마다 A4 한 장짜리 사진이 나와요</a:t>
             </a:r>
-            <a:endParaRPr lang="en-US" sz="1600" dirty="0"/>
+            <a:endParaRPr lang="en-US" sz="1400" dirty="0"/>
           </a:p>
         </p:txBody>
       </p:sp>
@@ -6916,7 +7144,7 @@
         <p:spPr>
           <a:xfrm>
             <a:off x="1188720" y="5221224"/>
-            <a:ext cx="3566160" cy="932688"/>
+            <a:ext cx="3566160" cy="475488"/>
           </a:xfrm>
           <a:prstGeom prst="rect">
             <a:avLst/>
@@ -6935,14 +7163,14 @@
               <a:buNone/>
             </a:pPr>
             <a:r>
-              <a:rPr lang="en-US" sz="1600" b="1" dirty="0">
+              <a:rPr lang="en-US" sz="1400" b="1" dirty="0">
                 <a:solidFill>
                   <a:srgbClr val="2B3550"/>
                 </a:solidFill>
               </a:rPr>
-              <a:t>가운데 점선을 따라 잘라요</a:t>
-            </a:r>
-            <a:endParaRPr lang="en-US" sz="1600" dirty="0"/>
+              <a:t>엑셀로 저장</a:t>
+            </a:r>
+            <a:endParaRPr lang="en-US" sz="1400" dirty="0"/>
           </a:p>
           <a:p>
             <a:pPr indent="0" marL="0">
@@ -6952,12 +7180,73 @@
               <a:buNone/>
             </a:pPr>
             <a:r>
-              <a:rPr lang="en-US" sz="1300" dirty="0">
+              <a:rPr lang="en-US" sz="1100" dirty="0">
                 <a:solidFill>
                   <a:srgbClr val="5B6680"/>
                 </a:solidFill>
               </a:rPr>
-              <a:t>교재에 한 장씩 붙여 주세요</a:t>
+              <a:t>적은 숙제를 남겨 두었다가 다음에 다시 올려요</a:t>
+            </a:r>
+            <a:endParaRPr lang="en-US" sz="1400" dirty="0"/>
+          </a:p>
+        </p:txBody>
+      </p:sp>
+      <p:sp>
+        <p:nvSpPr>
+          <p:cNvPr id="16" name="num4"/>
+          <p:cNvSpPr/>
+          <p:nvPr/>
+        </p:nvSpPr>
+        <p:spPr>
+          <a:xfrm>
+            <a:off x="640080" y="5824728"/>
+            <a:ext cx="384048" cy="384048"/>
+          </a:xfrm>
+          <a:prstGeom prst="ellipse">
+            <a:avLst/>
+          </a:prstGeom>
+          <a:solidFill>
+            <a:srgbClr val="E07A3F"/>
+          </a:solidFill>
+          <a:ln w="12700">
+            <a:solidFill>
+              <a:srgbClr val="E07A3F"/>
+            </a:solidFill>
+            <a:prstDash val="solid"/>
+          </a:ln>
+        </p:spPr>
+      </p:sp>
+      <p:sp>
+        <p:nvSpPr>
+          <p:cNvPr id="17" name="Text 14"/>
+          <p:cNvSpPr txBox="1"/>
+          <p:nvPr/>
+        </p:nvSpPr>
+        <p:spPr>
+          <a:xfrm>
+            <a:off x="640080" y="5824728"/>
+            <a:ext cx="384048" cy="384048"/>
+          </a:xfrm>
+          <a:prstGeom prst="rect">
+            <a:avLst/>
+          </a:prstGeom>
+          <a:noFill/>
+          <a:ln/>
+        </p:spPr>
+        <p:txBody>
+          <a:bodyPr wrap="square" lIns="0" tIns="0" rIns="0" bIns="0" rtlCol="0" anchor="ctr"/>
+          <a:lstStyle/>
+          <a:p>
+            <a:pPr algn="ctr" indent="0" marL="0">
+              <a:buNone/>
+            </a:pPr>
+            <a:r>
+              <a:rPr lang="en-US" sz="1600" b="1" dirty="0">
+                <a:solidFill>
+                  <a:srgbClr val="FFFFFF"/>
+                </a:solidFill>
+              </a:rPr>
+              <a:t>4</a:t>
             </a:r>
             <a:endParaRPr lang="en-US" sz="1600" dirty="0"/>
           </a:p>
@@ -6965,7 +7254,46 @@
       </p:sp>
       <p:sp>
         <p:nvSpPr>
-          <p:cNvPr id="16" name="Shape 13"/>
+          <p:cNvPr id="18" name="Text 15"/>
+          <p:cNvSpPr txBox="1"/>
+          <p:nvPr/>
+        </p:nvSpPr>
+        <p:spPr>
+          <a:xfrm>
+            <a:off x="1188720" y="5769864"/>
+            <a:ext cx="3566160" cy="475488"/>
+          </a:xfrm>
+          <a:prstGeom prst="rect">
+            <a:avLst/>
+          </a:prstGeom>
+          <a:noFill/>
+          <a:ln/>
+        </p:spPr>
+        <p:txBody>
+          <a:bodyPr wrap="square" lIns="0" tIns="0" rIns="0" bIns="0" rtlCol="0" anchor="t"/>
+          <a:lstStyle/>
+          <a:p>
+            <a:pPr indent="0" marL="0">
+              <a:spcAft>
+                <a:spcPts val="200"/>
+              </a:spcAft>
+              <a:buNone/>
+            </a:pPr>
+            <a:r>
+              <a:rPr lang="en-US" sz="1400" b="1" dirty="0">
+                <a:solidFill>
+                  <a:srgbClr val="2B3550"/>
+                </a:solidFill>
+              </a:rPr>
+              <a:t>가운데 점선을 따라 잘라 붙여요</a:t>
+            </a:r>
+            <a:endParaRPr lang="en-US" sz="1400" dirty="0"/>
+          </a:p>
+        </p:txBody>
+      </p:sp>
+      <p:sp>
+        <p:nvSpPr>
+          <p:cNvPr id="19" name="Shape 16"/>
           <p:cNvSpPr/>
           <p:nvPr/>
         </p:nvSpPr>
@@ -6999,7 +7327,7 @@
       </p:sp>
       <p:pic>
         <p:nvPicPr>
-          <p:cNvPr id="17" name="Image 1" descr="출력용 숙제 안내문 A4">    </p:cNvPr>
+          <p:cNvPr id="20" name="Image 1" descr="출력용 숙제 안내문 A4">    </p:cNvPr>
           <p:cNvPicPr>
             <a:picLocks noChangeAspect="1"/>
           </p:cNvPicPr>
@@ -7023,7 +7351,7 @@
       </p:pic>
       <p:sp>
         <p:nvSpPr>
-          <p:cNvPr id="18" name="Text 14"/>
+          <p:cNvPr id="21" name="Text 17"/>
           <p:cNvSpPr txBox="1"/>
           <p:nvPr/>
         </p:nvSpPr>
@@ -7195,7 +7523,7 @@
                   <a:schemeClr val="bg1"/>
                 </a:solidFill>
               </a:rPr>
-              <a:t>학생 피드백 만들기</a:t>
+              <a:t>학부모 피드백 만들기</a:t>
             </a:r>
             <a:endParaRPr lang="en-US" sz="4000" dirty="0"/>
           </a:p>
@@ -7210,7 +7538,7 @@
         <p:spPr>
           <a:xfrm>
             <a:off x="640080" y="2377440"/>
-            <a:ext cx="8229600" cy="457200"/>
+            <a:ext cx="10058400" cy="457200"/>
           </a:xfrm>
           <a:prstGeom prst="rect">
             <a:avLst/>
@@ -7231,7 +7559,7 @@
                   <a:srgbClr val="D6DFF0"/>
                 </a:solidFill>
               </a:rPr>
-              <a:t>한 달 전체로도, 차시마다도 보낼 수 있어요</a:t>
+              <a:t>반 공통 피드백은 한 번만 쓰고, 학생마다 체크만 더해요</a:t>
             </a:r>
             <a:endParaRPr lang="en-US" sz="1800" dirty="0"/>
           </a:p>
@@ -7355,21 +7683,7 @@
                   <a:srgbClr val="FFFFFF"/>
                 </a:solidFill>
               </a:rPr>
-              <a:t>학생과</a:t>
-            </a:r>
-            <a:endParaRPr lang="en-US" sz="1700" dirty="0"/>
-          </a:p>
-          <a:p>
-            <a:pPr indent="0" marL="0">
-              <a:buNone/>
-            </a:pPr>
-            <a:r>
-              <a:rPr lang="en-US" sz="1700" b="1" dirty="0">
-                <a:solidFill>
-                  <a:srgbClr val="FFFFFF"/>
-                </a:solidFill>
-              </a:rPr>
-              <a:t>보낼 범위 고르기</a:t>
+              <a:t>반 고르기</a:t>
             </a:r>
             <a:endParaRPr lang="en-US" sz="1700" dirty="0"/>
           </a:p>
@@ -7493,7 +7807,7 @@
                   <a:srgbClr val="FFFFFF"/>
                 </a:solidFill>
               </a:rPr>
-              <a:t>수업 모습</a:t>
+              <a:t>반 공통 피드백</a:t>
             </a:r>
             <a:endParaRPr lang="en-US" sz="1700" dirty="0"/>
           </a:p>
@@ -7507,7 +7821,7 @@
                   <a:srgbClr val="FFFFFF"/>
                 </a:solidFill>
               </a:rPr>
-              <a:t>체크하기</a:t>
+              <a:t>한 번 쓰기</a:t>
             </a:r>
             <a:endParaRPr lang="en-US" sz="1700" dirty="0"/>
           </a:p>
@@ -7631,7 +7945,21 @@
                   <a:srgbClr val="FFFFFF"/>
                 </a:solidFill>
               </a:rPr>
-              <a:t>문장 만들기</a:t>
+              <a:t>학생마다</a:t>
+            </a:r>
+            <a:endParaRPr lang="en-US" sz="1700" dirty="0"/>
+          </a:p>
+          <a:p>
+            <a:pPr indent="0" marL="0">
+              <a:buNone/>
+            </a:pPr>
+            <a:r>
+              <a:rPr lang="en-US" sz="1700" b="1" dirty="0">
+                <a:solidFill>
+                  <a:srgbClr val="FFFFFF"/>
+                </a:solidFill>
+              </a:rPr>
+              <a:t>상·중·하 체크</a:t>
             </a:r>
             <a:endParaRPr lang="en-US" sz="1700" dirty="0"/>
           </a:p>
@@ -7755,7 +8083,7 @@
                   <a:srgbClr val="FFFFFF"/>
                 </a:solidFill>
               </a:rPr>
-              <a:t>이미지 저장해서</a:t>
+              <a:t>완성본 복사·</a:t>
             </a:r>
             <a:endParaRPr lang="en-US" sz="1700" dirty="0"/>
           </a:p>
@@ -7769,7 +8097,7 @@
                   <a:srgbClr val="FFFFFF"/>
                 </a:solidFill>
               </a:rPr>
-              <a:t>보내기</a:t>
+              <a:t>이미지 저장</a:t>
             </a:r>
             <a:endParaRPr lang="en-US" sz="1700" dirty="0"/>
           </a:p>
@@ -7832,7 +8160,7 @@
                   <a:schemeClr val="tx2"/>
                 </a:solidFill>
               </a:rPr>
-              <a:t>학생을 고르고 체크해요</a:t>
+              <a:t>반을 고르고 공통 피드백을 써요</a:t>
             </a:r>
             <a:endParaRPr lang="en-US" sz="3000" dirty="0"/>
           </a:p>
@@ -7910,11 +8238,11 @@
         <p:spPr>
           <a:xfrm>
             <a:off x="658368" y="1298448"/>
-            <a:ext cx="3438144" cy="2393201"/>
+            <a:ext cx="5815584" cy="1722140"/>
           </a:xfrm>
           <a:prstGeom prst="roundRect">
             <a:avLst>
-              <a:gd name="adj" fmla="val 4585"/>
+              <a:gd name="adj" fmla="val 6372"/>
             </a:avLst>
           </a:prstGeom>
           <a:solidFill>
@@ -7937,7 +8265,7 @@
       </p:sp>
       <p:pic>
         <p:nvPicPr>
-          <p:cNvPr id="6" name="Image 0" descr="학생 고르기">    </p:cNvPr>
+          <p:cNvPr id="6" name="Image 0" descr="반 고르기">    </p:cNvPr>
           <p:cNvPicPr>
             <a:picLocks noChangeAspect="1"/>
           </p:cNvPicPr>
@@ -7952,7 +8280,7 @@
         <p:spPr>
           <a:xfrm>
             <a:off x="731520" y="1371600"/>
-            <a:ext cx="3291840" cy="2246897"/>
+            <a:ext cx="5669280" cy="1575836"/>
           </a:xfrm>
           <a:prstGeom prst="rect">
             <a:avLst/>
@@ -7967,12 +8295,12 @@
         </p:nvSpPr>
         <p:spPr>
           <a:xfrm>
-            <a:off x="4270248" y="1298448"/>
-            <a:ext cx="4169664" cy="3904969"/>
+            <a:off x="658368" y="3081528"/>
+            <a:ext cx="5815584" cy="2113768"/>
           </a:xfrm>
           <a:prstGeom prst="roundRect">
             <a:avLst>
-              <a:gd name="adj" fmla="val 2810"/>
+              <a:gd name="adj" fmla="val 5191"/>
             </a:avLst>
           </a:prstGeom>
           <a:solidFill>
@@ -7995,7 +8323,7 @@
       </p:sp>
       <p:pic>
         <p:nvPicPr>
-          <p:cNvPr id="8" name="Image 1" descr="수업 모습 체크">    </p:cNvPr>
+          <p:cNvPr id="8" name="Image 1" descr="반 공통 피드백">    </p:cNvPr>
           <p:cNvPicPr>
             <a:picLocks noChangeAspect="1"/>
           </p:cNvPicPr>
@@ -8009,8 +8337,8 @@
         </p:blipFill>
         <p:spPr>
           <a:xfrm>
-            <a:off x="4343400" y="1371600"/>
-            <a:ext cx="4023360" cy="3758665"/>
+            <a:off x="731520" y="3154680"/>
+            <a:ext cx="5669280" cy="1967464"/>
           </a:xfrm>
           <a:prstGeom prst="rect">
             <a:avLst/>
@@ -8025,7 +8353,7 @@
         </p:nvSpPr>
         <p:spPr>
           <a:xfrm>
-            <a:off x="8641080" y="1481328"/>
+            <a:off x="6766560" y="1481328"/>
             <a:ext cx="384048" cy="384048"/>
           </a:xfrm>
           <a:prstGeom prst="ellipse">
@@ -8050,7 +8378,7 @@
         </p:nvSpPr>
         <p:spPr>
           <a:xfrm>
-            <a:off x="8641080" y="1481328"/>
+            <a:off x="6766560" y="1481328"/>
             <a:ext cx="384048" cy="384048"/>
           </a:xfrm>
           <a:prstGeom prst="rect">
@@ -8086,8 +8414,8 @@
         </p:nvSpPr>
         <p:spPr>
           <a:xfrm>
-            <a:off x="9189720" y="1426464"/>
-            <a:ext cx="2468880" cy="1115568"/>
+            <a:off x="7315200" y="1426464"/>
+            <a:ext cx="4297680" cy="1069848"/>
           </a:xfrm>
           <a:prstGeom prst="rect">
             <a:avLst/>
@@ -8106,14 +8434,14 @@
               <a:buNone/>
             </a:pPr>
             <a:r>
-              <a:rPr lang="en-US" sz="1500" b="1" dirty="0">
+              <a:rPr lang="en-US" sz="1600" b="1" dirty="0">
                 <a:solidFill>
                   <a:srgbClr val="2B3550"/>
                 </a:solidFill>
               </a:rPr>
-              <a:t>반 명단에서 학생을 골라요</a:t>
-            </a:r>
-            <a:endParaRPr lang="en-US" sz="1500" dirty="0"/>
+              <a:t>반 명단에서 반을 골라요</a:t>
+            </a:r>
+            <a:endParaRPr lang="en-US" sz="1600" dirty="0"/>
           </a:p>
           <a:p>
             <a:pPr indent="0" marL="0">
@@ -8123,14 +8451,14 @@
               <a:buNone/>
             </a:pPr>
             <a:r>
-              <a:rPr lang="en-US" sz="1200" dirty="0">
+              <a:rPr lang="en-US" sz="1300" dirty="0">
                 <a:solidFill>
                   <a:srgbClr val="5B6680"/>
                 </a:solidFill>
               </a:rPr>
-              <a:t>과정과 월·호가 자동으로 맞춰져요</a:t>
-            </a:r>
-            <a:endParaRPr lang="en-US" sz="1500" dirty="0"/>
+              <a:t>과정과 그 달 활동리포트가 자동으로 맞춰져요 (10월 반은 10월)</a:t>
+            </a:r>
+            <a:endParaRPr lang="en-US" sz="1600" dirty="0"/>
           </a:p>
         </p:txBody>
       </p:sp>
@@ -8142,7 +8470,7 @@
         </p:nvSpPr>
         <p:spPr>
           <a:xfrm>
-            <a:off x="8641080" y="2670048"/>
+            <a:off x="6766560" y="2624328"/>
             <a:ext cx="384048" cy="384048"/>
           </a:xfrm>
           <a:prstGeom prst="ellipse">
@@ -8167,7 +8495,7 @@
         </p:nvSpPr>
         <p:spPr>
           <a:xfrm>
-            <a:off x="8641080" y="2670048"/>
+            <a:off x="6766560" y="2624328"/>
             <a:ext cx="384048" cy="384048"/>
           </a:xfrm>
           <a:prstGeom prst="rect">
@@ -8203,8 +8531,8 @@
         </p:nvSpPr>
         <p:spPr>
           <a:xfrm>
-            <a:off x="9189720" y="2615184"/>
-            <a:ext cx="2468880" cy="1115568"/>
+            <a:off x="7315200" y="2569464"/>
+            <a:ext cx="4297680" cy="1069848"/>
           </a:xfrm>
           <a:prstGeom prst="rect">
             <a:avLst/>
@@ -8223,14 +8551,14 @@
               <a:buNone/>
             </a:pPr>
             <a:r>
-              <a:rPr lang="en-US" sz="1500" b="1" dirty="0">
+              <a:rPr lang="en-US" sz="1600" b="1" dirty="0">
                 <a:solidFill>
                   <a:srgbClr val="2B3550"/>
                 </a:solidFill>
               </a:rPr>
-              <a:t>보낼 범위를 골라요</a:t>
-            </a:r>
-            <a:endParaRPr lang="en-US" sz="1500" dirty="0"/>
+              <a:t>'수업 내용으로 채우기'를 눌러요</a:t>
+            </a:r>
+            <a:endParaRPr lang="en-US" sz="1600" dirty="0"/>
           </a:p>
           <a:p>
             <a:pPr indent="0" marL="0">
@@ -8240,14 +8568,14 @@
               <a:buNone/>
             </a:pPr>
             <a:r>
-              <a:rPr lang="en-US" sz="1200" dirty="0">
+              <a:rPr lang="en-US" sz="1300" dirty="0">
                 <a:solidFill>
                   <a:srgbClr val="5B6680"/>
                 </a:solidFill>
               </a:rPr>
-              <a:t>한 달 전체 또는 1차시·2차시처럼 차시 하나</a:t>
-            </a:r>
-            <a:endParaRPr lang="en-US" sz="1500" dirty="0"/>
+              <a:t>차시별로 읽은 책과 활동이 들어가요. 필요한 부분만 남겨요</a:t>
+            </a:r>
+            <a:endParaRPr lang="en-US" sz="1600" dirty="0"/>
           </a:p>
         </p:txBody>
       </p:sp>
@@ -8259,7 +8587,7 @@
         </p:nvSpPr>
         <p:spPr>
           <a:xfrm>
-            <a:off x="8641080" y="3858768"/>
+            <a:off x="6766560" y="3767328"/>
             <a:ext cx="384048" cy="384048"/>
           </a:xfrm>
           <a:prstGeom prst="ellipse">
@@ -8284,7 +8612,7 @@
         </p:nvSpPr>
         <p:spPr>
           <a:xfrm>
-            <a:off x="8641080" y="3858768"/>
+            <a:off x="6766560" y="3767328"/>
             <a:ext cx="384048" cy="384048"/>
           </a:xfrm>
           <a:prstGeom prst="rect">
@@ -8320,8 +8648,8 @@
         </p:nvSpPr>
         <p:spPr>
           <a:xfrm>
-            <a:off x="9189720" y="3803904"/>
-            <a:ext cx="2468880" cy="1115568"/>
+            <a:off x="7315200" y="3712464"/>
+            <a:ext cx="4297680" cy="1069848"/>
           </a:xfrm>
           <a:prstGeom prst="rect">
             <a:avLst/>
@@ -8340,14 +8668,14 @@
               <a:buNone/>
             </a:pPr>
             <a:r>
-              <a:rPr lang="en-US" sz="1500" b="1" dirty="0">
+              <a:rPr lang="en-US" sz="1600" b="1" dirty="0">
                 <a:solidFill>
                   <a:srgbClr val="2B3550"/>
                 </a:solidFill>
               </a:rPr>
-              <a:t>상·중·하를 눌러 체크해요</a:t>
-            </a:r>
-            <a:endParaRPr lang="en-US" sz="1500" dirty="0"/>
+              <a:t>반 친구 모두에게 똑같이 들어가요</a:t>
+            </a:r>
+            <a:endParaRPr lang="en-US" sz="1600" dirty="0"/>
           </a:p>
           <a:p>
             <a:pPr indent="0" marL="0">
@@ -8357,14 +8685,14 @@
               <a:buNone/>
             </a:pPr>
             <a:r>
-              <a:rPr lang="en-US" sz="1200" dirty="0">
+              <a:rPr lang="en-US" sz="1300" dirty="0">
                 <a:solidFill>
                   <a:srgbClr val="5B6680"/>
                 </a:solidFill>
               </a:rPr>
-              <a:t>학부모님께는 보이지 않아요. 다시 누르면 지워져요</a:t>
-            </a:r>
-            <a:endParaRPr lang="en-US" sz="1500" dirty="0"/>
+              <a:t>{이름}이라고 쓰면 학생마다 이름으로 바뀌어요</a:t>
+            </a:r>
+            <a:endParaRPr lang="en-US" sz="1600" dirty="0"/>
           </a:p>
         </p:txBody>
       </p:sp>
@@ -8376,7 +8704,7 @@
         </p:nvSpPr>
         <p:spPr>
           <a:xfrm>
-            <a:off x="8641080" y="5047488"/>
+            <a:off x="6766560" y="4910328"/>
             <a:ext cx="384048" cy="384048"/>
           </a:xfrm>
           <a:prstGeom prst="ellipse">
@@ -8401,7 +8729,7 @@
         </p:nvSpPr>
         <p:spPr>
           <a:xfrm>
-            <a:off x="8641080" y="5047488"/>
+            <a:off x="6766560" y="4910328"/>
             <a:ext cx="384048" cy="384048"/>
           </a:xfrm>
           <a:prstGeom prst="rect">
@@ -8437,8 +8765,8 @@
         </p:nvSpPr>
         <p:spPr>
           <a:xfrm>
-            <a:off x="9189720" y="4992624"/>
-            <a:ext cx="2468880" cy="1115568"/>
+            <a:off x="7315200" y="4855464"/>
+            <a:ext cx="4297680" cy="1069848"/>
           </a:xfrm>
           <a:prstGeom prst="rect">
             <a:avLst/>
@@ -8457,14 +8785,14 @@
               <a:buNone/>
             </a:pPr>
             <a:r>
-              <a:rPr lang="en-US" sz="1500" b="1" dirty="0">
+              <a:rPr lang="en-US" sz="1600" b="1" dirty="0">
                 <a:solidFill>
                   <a:srgbClr val="2B3550"/>
                 </a:solidFill>
               </a:rPr>
-              <a:t>덧붙일 말은 선택이에요</a:t>
-            </a:r>
-            <a:endParaRPr lang="en-US" sz="1500" dirty="0"/>
+              <a:t>반 명단이 없으면</a:t>
+            </a:r>
+            <a:endParaRPr lang="en-US" sz="1600" dirty="0"/>
           </a:p>
           <a:p>
             <a:pPr indent="0" marL="0">
@@ -8474,91 +8802,14 @@
               <a:buNone/>
             </a:pPr>
             <a:r>
-              <a:rPr lang="en-US" sz="1200" dirty="0">
+              <a:rPr lang="en-US" sz="1300" dirty="0">
                 <a:solidFill>
                   <a:srgbClr val="5B6680"/>
                 </a:solidFill>
               </a:rPr>
-              <a:t>적으면 문장 끝에 그대로 들어가요</a:t>
-            </a:r>
-            <a:endParaRPr lang="en-US" sz="1500" dirty="0"/>
-          </a:p>
-        </p:txBody>
-      </p:sp>
-      <p:sp>
-        <p:nvSpPr>
-          <p:cNvPr id="21" name="card"/>
-          <p:cNvSpPr/>
-          <p:nvPr/>
-        </p:nvSpPr>
-        <p:spPr>
-          <a:xfrm>
-            <a:off x="548640" y="4023360"/>
-            <a:ext cx="3611880" cy="914400"/>
-          </a:xfrm>
-          <a:prstGeom prst="roundRect">
-            <a:avLst>
-              <a:gd name="adj" fmla="val 14000"/>
-            </a:avLst>
-          </a:prstGeom>
-          <a:solidFill>
-            <a:srgbClr val="FFF4D6"/>
-          </a:solidFill>
-          <a:ln w="9525">
-            <a:solidFill>
-              <a:srgbClr val="DDE2EA"/>
-            </a:solidFill>
-            <a:prstDash val="solid"/>
-          </a:ln>
-        </p:spPr>
-      </p:sp>
-      <p:sp>
-        <p:nvSpPr>
-          <p:cNvPr id="22" name="Text 18"/>
-          <p:cNvSpPr txBox="1"/>
-          <p:nvPr/>
-        </p:nvSpPr>
-        <p:spPr>
-          <a:xfrm>
-            <a:off x="731520" y="4069080"/>
-            <a:ext cx="3291840" cy="822960"/>
-          </a:xfrm>
-          <a:prstGeom prst="rect">
-            <a:avLst/>
-          </a:prstGeom>
-          <a:noFill/>
-          <a:ln/>
-        </p:spPr>
-        <p:txBody>
-          <a:bodyPr wrap="square" lIns="0" tIns="0" rIns="0" bIns="0" rtlCol="0" anchor="ctr"/>
-          <a:lstStyle/>
-          <a:p>
-            <a:pPr indent="0" marL="0">
-              <a:buNone/>
-            </a:pPr>
-            <a:r>
-              <a:rPr lang="en-US" sz="1200" b="1" dirty="0">
-                <a:solidFill>
-                  <a:srgbClr val="2B3550"/>
-                </a:solidFill>
-              </a:rPr>
-              <a:t>체크하지 않은 항목은</a:t>
-            </a:r>
-            <a:endParaRPr lang="en-US" sz="1200" dirty="0"/>
-          </a:p>
-          <a:p>
-            <a:pPr indent="0" marL="0">
-              <a:buNone/>
-            </a:pPr>
-            <a:r>
-              <a:rPr lang="en-US" sz="1200" dirty="0">
-                <a:solidFill>
-                  <a:srgbClr val="2B3550"/>
-                </a:solidFill>
-              </a:rPr>
-              <a:t>문장에 넣지 않아요. 필요한 항목만 눌러 주세요.</a:t>
-            </a:r>
-            <a:endParaRPr lang="en-US" sz="1200" dirty="0"/>
+              <a:t>'과정·월 직접 고르기'에서 과정과 월·호를 골라요</a:t>
+            </a:r>
+            <a:endParaRPr lang="en-US" sz="1600" dirty="0"/>
           </a:p>
         </p:txBody>
       </p:sp>
@@ -8664,7 +8915,7 @@
                   <a:schemeClr val="tx2"/>
                 </a:solidFill>
               </a:rPr>
-              <a:t>'문장 만들기'를 누르고 다듬어요</a:t>
+              <a:t>학생마다 상·중·하를 체크해요</a:t>
             </a:r>
             <a:endParaRPr lang="en-US" sz="3000" dirty="0"/>
           </a:p>
@@ -8742,11 +8993,11 @@
         <p:spPr>
           <a:xfrm>
             <a:off x="658368" y="1298448"/>
-            <a:ext cx="3672375" cy="4855464"/>
+            <a:ext cx="4451822" cy="4855464"/>
           </a:xfrm>
           <a:prstGeom prst="roundRect">
             <a:avLst>
-              <a:gd name="adj" fmla="val 2988"/>
+              <a:gd name="adj" fmla="val 2465"/>
             </a:avLst>
           </a:prstGeom>
           <a:solidFill>
@@ -8769,7 +9020,7 @@
       </p:sp>
       <p:pic>
         <p:nvPicPr>
-          <p:cNvPr id="6" name="Image 0" descr="문장 만들기와 인사말 고르기">    </p:cNvPr>
+          <p:cNvPr id="6" name="Image 0" descr="학생별 상중하 체크">    </p:cNvPr>
           <p:cNvPicPr>
             <a:picLocks noChangeAspect="1"/>
           </p:cNvPicPr>
@@ -8784,7 +9035,7 @@
         <p:spPr>
           <a:xfrm>
             <a:off x="731520" y="1371600"/>
-            <a:ext cx="3526071" cy="4709160"/>
+            <a:ext cx="4305518" cy="4709160"/>
           </a:xfrm>
           <a:prstGeom prst="rect">
             <a:avLst/>
@@ -8799,7 +9050,7 @@
         </p:nvSpPr>
         <p:spPr>
           <a:xfrm>
-            <a:off x="4297680" y="1481328"/>
+            <a:off x="6766560" y="1481328"/>
             <a:ext cx="384048" cy="384048"/>
           </a:xfrm>
           <a:prstGeom prst="ellipse">
@@ -8824,7 +9075,7 @@
         </p:nvSpPr>
         <p:spPr>
           <a:xfrm>
-            <a:off x="4297680" y="1481328"/>
+            <a:off x="6766560" y="1481328"/>
             <a:ext cx="384048" cy="384048"/>
           </a:xfrm>
           <a:prstGeom prst="rect">
@@ -8860,8 +9111,8 @@
         </p:nvSpPr>
         <p:spPr>
           <a:xfrm>
-            <a:off x="4846320" y="1426464"/>
-            <a:ext cx="6766560" cy="1024128"/>
+            <a:off x="7315200" y="1426464"/>
+            <a:ext cx="4297680" cy="1024128"/>
           </a:xfrm>
           <a:prstGeom prst="rect">
             <a:avLst/>
@@ -8880,14 +9131,14 @@
               <a:buNone/>
             </a:pPr>
             <a:r>
-              <a:rPr lang="en-US" sz="1700" b="1" dirty="0">
+              <a:rPr lang="en-US" sz="1600" b="1" dirty="0">
                 <a:solidFill>
                   <a:srgbClr val="2B3550"/>
                 </a:solidFill>
               </a:rPr>
-              <a:t>수업 내용으로 시작하는 문장이 들어가요</a:t>
-            </a:r>
-            <a:endParaRPr lang="en-US" sz="1700" dirty="0"/>
+              <a:t>학생 이름을 눌러요</a:t>
+            </a:r>
+            <a:endParaRPr lang="en-US" sz="1600" dirty="0"/>
           </a:p>
           <a:p>
             <a:pPr indent="0" marL="0">
@@ -8897,14 +9148,14 @@
               <a:buNone/>
             </a:pPr>
             <a:r>
-              <a:rPr lang="en-US" sz="1400" dirty="0">
+              <a:rPr lang="en-US" sz="1300" dirty="0">
                 <a:solidFill>
                   <a:srgbClr val="5B6680"/>
                 </a:solidFill>
               </a:rPr>
-              <a:t>읽은 책과 활동 → 체크한 항목 → 마지막 인사말 순서예요</a:t>
-            </a:r>
-            <a:endParaRPr lang="en-US" sz="1700" dirty="0"/>
+              <a:t>'다음 학생 →'으로 차례로 넘어가요</a:t>
+            </a:r>
+            <a:endParaRPr lang="en-US" sz="1600" dirty="0"/>
           </a:p>
         </p:txBody>
       </p:sp>
@@ -8916,7 +9167,7 @@
         </p:nvSpPr>
         <p:spPr>
           <a:xfrm>
-            <a:off x="4297680" y="2578608"/>
+            <a:off x="6766560" y="2578608"/>
             <a:ext cx="384048" cy="384048"/>
           </a:xfrm>
           <a:prstGeom prst="ellipse">
@@ -8941,7 +9192,7 @@
         </p:nvSpPr>
         <p:spPr>
           <a:xfrm>
-            <a:off x="4297680" y="2578608"/>
+            <a:off x="6766560" y="2578608"/>
             <a:ext cx="384048" cy="384048"/>
           </a:xfrm>
           <a:prstGeom prst="rect">
@@ -8977,8 +9228,8 @@
         </p:nvSpPr>
         <p:spPr>
           <a:xfrm>
-            <a:off x="4846320" y="2523744"/>
-            <a:ext cx="6766560" cy="1024128"/>
+            <a:off x="7315200" y="2523744"/>
+            <a:ext cx="4297680" cy="1024128"/>
           </a:xfrm>
           <a:prstGeom prst="rect">
             <a:avLst/>
@@ -8997,14 +9248,14 @@
               <a:buNone/>
             </a:pPr>
             <a:r>
-              <a:rPr lang="en-US" sz="1700" b="1" dirty="0">
+              <a:rPr lang="en-US" sz="1600" b="1" dirty="0">
                 <a:solidFill>
                   <a:srgbClr val="2B3550"/>
                 </a:solidFill>
               </a:rPr>
-              <a:t>마지막 인사말을 눌러서 골라요</a:t>
-            </a:r>
-            <a:endParaRPr lang="en-US" sz="1700" dirty="0"/>
+              <a:t>항목마다 상·중·하를 눌러요</a:t>
+            </a:r>
+            <a:endParaRPr lang="en-US" sz="1600" dirty="0"/>
           </a:p>
           <a:p>
             <a:pPr indent="0" marL="0">
@@ -9014,14 +9265,14 @@
               <a:buNone/>
             </a:pPr>
             <a:r>
-              <a:rPr lang="en-US" sz="1400" dirty="0">
+              <a:rPr lang="en-US" sz="1300" dirty="0">
                 <a:solidFill>
                   <a:srgbClr val="5B6680"/>
                 </a:solidFill>
               </a:rPr>
-              <a:t>아래 칸에 내 인사말을 추가할 수도 있어요 (내 기기에 저장)</a:t>
-            </a:r>
-            <a:endParaRPr lang="en-US" sz="1700" dirty="0"/>
+              <a:t>필독서 이해·협동심·어휘력·토론능력·수업 참여도·발표·글쓰기. 다시 누르면 지워져요</a:t>
+            </a:r>
+            <a:endParaRPr lang="en-US" sz="1600" dirty="0"/>
           </a:p>
         </p:txBody>
       </p:sp>
@@ -9033,7 +9284,7 @@
         </p:nvSpPr>
         <p:spPr>
           <a:xfrm>
-            <a:off x="4297680" y="3675888"/>
+            <a:off x="6766560" y="3675888"/>
             <a:ext cx="384048" cy="384048"/>
           </a:xfrm>
           <a:prstGeom prst="ellipse">
@@ -9058,7 +9309,7 @@
         </p:nvSpPr>
         <p:spPr>
           <a:xfrm>
-            <a:off x="4297680" y="3675888"/>
+            <a:off x="6766560" y="3675888"/>
             <a:ext cx="384048" cy="384048"/>
           </a:xfrm>
           <a:prstGeom prst="rect">
@@ -9094,8 +9345,8 @@
         </p:nvSpPr>
         <p:spPr>
           <a:xfrm>
-            <a:off x="4846320" y="3621024"/>
-            <a:ext cx="6766560" cy="1024128"/>
+            <a:off x="7315200" y="3621024"/>
+            <a:ext cx="4297680" cy="1024128"/>
           </a:xfrm>
           <a:prstGeom prst="rect">
             <a:avLst/>
@@ -9114,14 +9365,14 @@
               <a:buNone/>
             </a:pPr>
             <a:r>
-              <a:rPr lang="en-US" sz="1700" b="1" dirty="0">
+              <a:rPr lang="en-US" sz="1600" b="1" dirty="0">
                 <a:solidFill>
                   <a:srgbClr val="2B3550"/>
                 </a:solidFill>
               </a:rPr>
-              <a:t>'다른 표현으로'를 누르면 표현이 바뀌어요</a:t>
-            </a:r>
-            <a:endParaRPr lang="en-US" sz="1700" dirty="0"/>
+              <a:t>개인 피드백을 직접 써도 돼요</a:t>
+            </a:r>
+            <a:endParaRPr lang="en-US" sz="1600" dirty="0"/>
           </a:p>
           <a:p>
             <a:pPr indent="0" marL="0">
@@ -9131,14 +9382,14 @@
               <a:buNone/>
             </a:pPr>
             <a:r>
-              <a:rPr lang="en-US" sz="1400" dirty="0">
+              <a:rPr lang="en-US" sz="1300" dirty="0">
                 <a:solidFill>
                   <a:srgbClr val="5B6680"/>
                 </a:solidFill>
               </a:rPr>
-              <a:t>같은 반 친구들 문장이 겹치지 않게 골라 주세요</a:t>
-            </a:r>
-            <a:endParaRPr lang="en-US" sz="1700" dirty="0"/>
+              <a:t>체크한 문장 뒤에 이어서 들어가요</a:t>
+            </a:r>
+            <a:endParaRPr lang="en-US" sz="1600" dirty="0"/>
           </a:p>
         </p:txBody>
       </p:sp>
@@ -9150,7 +9401,7 @@
         </p:nvSpPr>
         <p:spPr>
           <a:xfrm>
-            <a:off x="4297680" y="4773168"/>
+            <a:off x="6766560" y="4773168"/>
             <a:ext cx="384048" cy="384048"/>
           </a:xfrm>
           <a:prstGeom prst="ellipse">
@@ -9175,7 +9426,7 @@
         </p:nvSpPr>
         <p:spPr>
           <a:xfrm>
-            <a:off x="4297680" y="4773168"/>
+            <a:off x="6766560" y="4773168"/>
             <a:ext cx="384048" cy="384048"/>
           </a:xfrm>
           <a:prstGeom prst="rect">
@@ -9211,8 +9462,8 @@
         </p:nvSpPr>
         <p:spPr>
           <a:xfrm>
-            <a:off x="4846320" y="4718304"/>
-            <a:ext cx="6766560" cy="1024128"/>
+            <a:off x="7315200" y="4718304"/>
+            <a:ext cx="4297680" cy="1024128"/>
           </a:xfrm>
           <a:prstGeom prst="rect">
             <a:avLst/>
@@ -9231,14 +9482,14 @@
               <a:buNone/>
             </a:pPr>
             <a:r>
-              <a:rPr lang="en-US" sz="1700" b="1" dirty="0">
+              <a:rPr lang="en-US" sz="1600" b="1" dirty="0">
                 <a:solidFill>
                   <a:srgbClr val="2B3550"/>
                 </a:solidFill>
               </a:rPr>
-              <a:t>문장은 눌러서 직접 고쳐요</a:t>
-            </a:r>
-            <a:endParaRPr lang="en-US" sz="1700" dirty="0"/>
+              <a:t>이름이 없는 팀 반도 체크할 수 있어요</a:t>
+            </a:r>
+            <a:endParaRPr lang="en-US" sz="1600" dirty="0"/>
           </a:p>
           <a:p>
             <a:pPr indent="0" marL="0">
@@ -9248,14 +9499,14 @@
               <a:buNone/>
             </a:pPr>
             <a:r>
-              <a:rPr lang="en-US" sz="1400" dirty="0">
+              <a:rPr lang="en-US" sz="1300" dirty="0">
                 <a:solidFill>
                   <a:srgbClr val="5B6680"/>
                 </a:solidFill>
               </a:rPr>
-              <a:t>고친 문장은 그대로 이미지에 들어가고, 다시 만들기 전에 한 번 물어봐요</a:t>
-            </a:r>
-            <a:endParaRPr lang="en-US" sz="1700" dirty="0"/>
+              <a:t>'학생 이름 없이 쓰기'로 쓰거나 이름을 추가해요</a:t>
+            </a:r>
+            <a:endParaRPr lang="en-US" sz="1600" dirty="0"/>
           </a:p>
         </p:txBody>
       </p:sp>
@@ -9267,16 +9518,16 @@
         </p:nvSpPr>
         <p:spPr>
           <a:xfrm>
-            <a:off x="4297680" y="5532120"/>
-            <a:ext cx="7315200" cy="640080"/>
+            <a:off x="6766560" y="5669280"/>
+            <a:ext cx="4846320" cy="548640"/>
           </a:xfrm>
           <a:prstGeom prst="roundRect">
             <a:avLst>
-              <a:gd name="adj" fmla="val 20000"/>
+              <a:gd name="adj" fmla="val 23333"/>
             </a:avLst>
           </a:prstGeom>
           <a:solidFill>
-            <a:srgbClr val="EAF1FC"/>
+            <a:srgbClr val="FFF4D6"/>
           </a:solidFill>
           <a:ln w="9525">
             <a:solidFill>
@@ -9294,8 +9545,8 @@
         </p:nvSpPr>
         <p:spPr>
           <a:xfrm>
-            <a:off x="4480560" y="5532120"/>
-            <a:ext cx="7040880" cy="640080"/>
+            <a:off x="6949440" y="5669280"/>
+            <a:ext cx="4572000" cy="548640"/>
           </a:xfrm>
           <a:prstGeom prst="rect">
             <a:avLst/>
@@ -9313,10 +9564,10 @@
             <a:r>
               <a:rPr lang="en-US" sz="1200" dirty="0">
                 <a:solidFill>
-                  <a:srgbClr val="1F2A4A"/>
-                </a:solidFill>
-              </a:rPr>
-              <a:t>미리 만들어 둔 문장이라 Claude 사용량이 들지 않아요. '문장 복사'로 카톡에 붙여 넣을 수도 있어요.</a:t>
+                  <a:srgbClr val="2B3550"/>
+                </a:solidFill>
+              </a:rPr>
+              <a:t>적은 내용은 이 기기 브라우저에 남아서, 다음에 열어도 그대로예요.</a:t>
             </a:r>
             <a:endParaRPr lang="en-US" sz="1200" dirty="0"/>
           </a:p>
@@ -9424,7 +9675,7 @@
                   <a:schemeClr val="tx2"/>
                 </a:solidFill>
               </a:rPr>
-              <a:t>이미지로 저장해서 보내요</a:t>
+              <a:t>완성본을 확인하고 복사해요</a:t>
             </a:r>
             <a:endParaRPr lang="en-US" sz="3000" dirty="0"/>
           </a:p>
@@ -9502,11 +9753,11 @@
         <p:spPr>
           <a:xfrm>
             <a:off x="658368" y="1298448"/>
-            <a:ext cx="2687980" cy="4855464"/>
+            <a:ext cx="2972730" cy="4855464"/>
           </a:xfrm>
           <a:prstGeom prst="roundRect">
             <a:avLst>
-              <a:gd name="adj" fmla="val 4082"/>
+              <a:gd name="adj" fmla="val 3691"/>
             </a:avLst>
           </a:prstGeom>
           <a:solidFill>
@@ -9529,7 +9780,7 @@
       </p:sp>
       <p:pic>
         <p:nvPicPr>
-          <p:cNvPr id="6" name="Image 0" descr="피드백이 들어간 이미지">    </p:cNvPr>
+          <p:cNvPr id="6" name="Image 0" descr="완성본과 인사말">    </p:cNvPr>
           <p:cNvPicPr>
             <a:picLocks noChangeAspect="1"/>
           </p:cNvPicPr>
@@ -9544,7 +9795,7 @@
         <p:spPr>
           <a:xfrm>
             <a:off x="731520" y="1371600"/>
-            <a:ext cx="2541676" cy="4709160"/>
+            <a:ext cx="2826426" cy="4709160"/>
           </a:xfrm>
           <a:prstGeom prst="rect">
             <a:avLst/>
@@ -9553,121 +9804,13 @@
       </p:pic>
       <p:sp>
         <p:nvSpPr>
-          <p:cNvPr id="7" name="Shape 4"/>
+          <p:cNvPr id="7" name="num1"/>
           <p:cNvSpPr/>
           <p:nvPr/>
         </p:nvSpPr>
         <p:spPr>
           <a:xfrm>
-            <a:off x="3858768" y="1298448"/>
-            <a:ext cx="2889504" cy="2965704"/>
-          </a:xfrm>
-          <a:prstGeom prst="roundRect">
-            <a:avLst>
-              <a:gd name="adj" fmla="val 3797"/>
-            </a:avLst>
-          </a:prstGeom>
-          <a:solidFill>
-            <a:srgbClr val="FFFFFF"/>
-          </a:solidFill>
-          <a:ln w="12700">
-            <a:solidFill>
-              <a:srgbClr val="C9D0DC"/>
-            </a:solidFill>
-            <a:prstDash val="solid"/>
-          </a:ln>
-          <a:effectLst>
-            <a:outerShdw sx="100000" sy="100000" kx="0" ky="0" algn="bl" rotWithShape="0" blurRad="101600" dist="38100" dir="5400000">
-              <a:srgbClr val="1F2A4A">
-                <a:alpha val="18000"/>
-              </a:srgbClr>
-            </a:outerShdw>
-          </a:effectLst>
-        </p:spPr>
-      </p:sp>
-      <p:pic>
-        <p:nvPicPr>
-          <p:cNvPr id="8" name="Image 1" descr="차시 하나만 들어간 이미지">    </p:cNvPr>
-          <p:cNvPicPr>
-            <a:picLocks noChangeAspect="1"/>
-          </p:cNvPicPr>
-          <p:nvPr/>
-        </p:nvPicPr>
-        <p:blipFill>
-          <a:blip r:embed="rId2"/>
-          <a:stretch>
-            <a:fillRect/>
-          </a:stretch>
-        </p:blipFill>
-        <p:spPr>
-          <a:xfrm>
-            <a:off x="3931920" y="1371600"/>
-            <a:ext cx="2743200" cy="2819400"/>
-          </a:xfrm>
-          <a:prstGeom prst="rect">
-            <a:avLst/>
-          </a:prstGeom>
-        </p:spPr>
-      </p:pic>
-      <p:sp>
-        <p:nvSpPr>
-          <p:cNvPr id="9" name="Text 5"/>
-          <p:cNvSpPr txBox="1"/>
-          <p:nvPr/>
-        </p:nvSpPr>
-        <p:spPr>
-          <a:xfrm>
-            <a:off x="3840480" y="5440680"/>
-            <a:ext cx="2926080" cy="640080"/>
-          </a:xfrm>
-          <a:prstGeom prst="rect">
-            <a:avLst/>
-          </a:prstGeom>
-          <a:noFill/>
-          <a:ln/>
-        </p:spPr>
-        <p:txBody>
-          <a:bodyPr wrap="square" lIns="0" tIns="0" rIns="0" bIns="0" rtlCol="0" anchor="ctr"/>
-          <a:lstStyle/>
-          <a:p>
-            <a:pPr algn="ctr" indent="0" marL="0">
-              <a:buNone/>
-            </a:pPr>
-            <a:r>
-              <a:rPr lang="en-US" sz="1300" dirty="0">
-                <a:solidFill>
-                  <a:srgbClr val="5B6680"/>
-                </a:solidFill>
-              </a:rPr>
-              <a:t>한 달 전체 (왼쪽)</a:t>
-            </a:r>
-            <a:endParaRPr lang="en-US" sz="1300" dirty="0"/>
-          </a:p>
-          <a:p>
-            <a:pPr algn="ctr" indent="0" marL="0">
-              <a:buNone/>
-            </a:pPr>
-            <a:r>
-              <a:rPr lang="en-US" sz="1300" dirty="0">
-                <a:solidFill>
-                  <a:srgbClr val="5B6680"/>
-                </a:solidFill>
-              </a:rPr>
-              <a:t>차시 하나 (오른쪽)</a:t>
-            </a:r>
-            <a:endParaRPr lang="en-US" sz="1300" dirty="0"/>
-          </a:p>
-        </p:txBody>
-      </p:sp>
-      <p:sp>
-        <p:nvSpPr>
-          <p:cNvPr id="10" name="num1"/>
-          <p:cNvSpPr/>
-          <p:nvPr/>
-        </p:nvSpPr>
-        <p:spPr>
-          <a:xfrm>
-            <a:off x="7223760" y="1481328"/>
+            <a:off x="4206240" y="1481328"/>
             <a:ext cx="384048" cy="384048"/>
           </a:xfrm>
           <a:prstGeom prst="ellipse">
@@ -9686,13 +9829,13 @@
       </p:sp>
       <p:sp>
         <p:nvSpPr>
-          <p:cNvPr id="11" name="Text 7"/>
-          <p:cNvSpPr txBox="1"/>
-          <p:nvPr/>
-        </p:nvSpPr>
-        <p:spPr>
-          <a:xfrm>
-            <a:off x="7223760" y="1481328"/>
+          <p:cNvPr id="8" name="Text 5"/>
+          <p:cNvSpPr txBox="1"/>
+          <p:nvPr/>
+        </p:nvSpPr>
+        <p:spPr>
+          <a:xfrm>
+            <a:off x="4206240" y="1481328"/>
             <a:ext cx="384048" cy="384048"/>
           </a:xfrm>
           <a:prstGeom prst="rect">
@@ -9722,14 +9865,14 @@
       </p:sp>
       <p:sp>
         <p:nvSpPr>
-          <p:cNvPr id="12" name="Text 8"/>
-          <p:cNvSpPr txBox="1"/>
-          <p:nvPr/>
-        </p:nvSpPr>
-        <p:spPr>
-          <a:xfrm>
-            <a:off x="7772400" y="1426464"/>
-            <a:ext cx="3840480" cy="1252728"/>
+          <p:cNvPr id="9" name="Text 6"/>
+          <p:cNvSpPr txBox="1"/>
+          <p:nvPr/>
+        </p:nvSpPr>
+        <p:spPr>
+          <a:xfrm>
+            <a:off x="4754880" y="1426464"/>
+            <a:ext cx="6858000" cy="1024128"/>
           </a:xfrm>
           <a:prstGeom prst="rect">
             <a:avLst/>
@@ -9753,138 +9896,21 @@
                   <a:srgbClr val="2B3550"/>
                 </a:solidFill>
               </a:rPr>
-              <a:t>'이미지 저장'을 눌러요</a:t>
+              <a:t>공통 + 개인 피드백 + 인사말이 자동으로 합쳐져요</a:t>
             </a:r>
             <a:endParaRPr lang="en-US" sz="1700" dirty="0"/>
           </a:p>
-          <a:p>
-            <a:pPr indent="0" marL="0">
-              <a:spcAft>
-                <a:spcPts val="200"/>
-              </a:spcAft>
-              <a:buNone/>
-            </a:pPr>
-            <a:r>
-              <a:rPr lang="en-US" sz="1400" dirty="0">
-                <a:solidFill>
-                  <a:srgbClr val="5B6680"/>
-                </a:solidFill>
-              </a:rPr>
-              <a:t>고른 범위의 수업 소개와 피드백이 한 장에 들어가요</a:t>
-            </a:r>
-            <a:endParaRPr lang="en-US" sz="1700" dirty="0"/>
-          </a:p>
-        </p:txBody>
-      </p:sp>
-      <p:sp>
-        <p:nvSpPr>
-          <p:cNvPr id="13" name="num2"/>
+        </p:txBody>
+      </p:sp>
+      <p:sp>
+        <p:nvSpPr>
+          <p:cNvPr id="10" name="num2"/>
           <p:cNvSpPr/>
           <p:nvPr/>
         </p:nvSpPr>
         <p:spPr>
           <a:xfrm>
-            <a:off x="7223760" y="2807208"/>
-            <a:ext cx="384048" cy="384048"/>
-          </a:xfrm>
-          <a:prstGeom prst="ellipse">
-            <a:avLst/>
-          </a:prstGeom>
-          <a:solidFill>
-            <a:srgbClr val="1F2A4A"/>
-          </a:solidFill>
-          <a:ln w="12700">
-            <a:solidFill>
-              <a:srgbClr val="1F2A4A"/>
-            </a:solidFill>
-            <a:prstDash val="solid"/>
-          </a:ln>
-        </p:spPr>
-      </p:sp>
-      <p:sp>
-        <p:nvSpPr>
-          <p:cNvPr id="14" name="Text 10"/>
-          <p:cNvSpPr txBox="1"/>
-          <p:nvPr/>
-        </p:nvSpPr>
-        <p:spPr>
-          <a:xfrm>
-            <a:off x="7223760" y="2807208"/>
-            <a:ext cx="384048" cy="384048"/>
-          </a:xfrm>
-          <a:prstGeom prst="rect">
-            <a:avLst/>
-          </a:prstGeom>
-          <a:noFill/>
-          <a:ln/>
-        </p:spPr>
-        <p:txBody>
-          <a:bodyPr wrap="square" lIns="0" tIns="0" rIns="0" bIns="0" rtlCol="0" anchor="ctr"/>
-          <a:lstStyle/>
-          <a:p>
-            <a:pPr algn="ctr" indent="0" marL="0">
-              <a:buNone/>
-            </a:pPr>
-            <a:r>
-              <a:rPr lang="en-US" sz="1600" b="1" dirty="0">
-                <a:solidFill>
-                  <a:srgbClr val="FFFFFF"/>
-                </a:solidFill>
-              </a:rPr>
-              <a:t>2</a:t>
-            </a:r>
-            <a:endParaRPr lang="en-US" sz="1600" dirty="0"/>
-          </a:p>
-        </p:txBody>
-      </p:sp>
-      <p:sp>
-        <p:nvSpPr>
-          <p:cNvPr id="15" name="Text 11"/>
-          <p:cNvSpPr txBox="1"/>
-          <p:nvPr/>
-        </p:nvSpPr>
-        <p:spPr>
-          <a:xfrm>
-            <a:off x="7772400" y="2752344"/>
-            <a:ext cx="3840480" cy="1252728"/>
-          </a:xfrm>
-          <a:prstGeom prst="rect">
-            <a:avLst/>
-          </a:prstGeom>
-          <a:noFill/>
-          <a:ln/>
-        </p:spPr>
-        <p:txBody>
-          <a:bodyPr wrap="square" lIns="0" tIns="0" rIns="0" bIns="0" rtlCol="0" anchor="t"/>
-          <a:lstStyle/>
-          <a:p>
-            <a:pPr indent="0" marL="0">
-              <a:spcAft>
-                <a:spcPts val="200"/>
-              </a:spcAft>
-              <a:buNone/>
-            </a:pPr>
-            <a:r>
-              <a:rPr lang="en-US" sz="1700" b="1" dirty="0">
-                <a:solidFill>
-                  <a:srgbClr val="2B3550"/>
-                </a:solidFill>
-              </a:rPr>
-              <a:t>학부모님께 카톡으로 보내요</a:t>
-            </a:r>
-            <a:endParaRPr lang="en-US" sz="1700" dirty="0"/>
-          </a:p>
-        </p:txBody>
-      </p:sp>
-      <p:sp>
-        <p:nvSpPr>
-          <p:cNvPr id="16" name="num3"/>
-          <p:cNvSpPr/>
-          <p:nvPr/>
-        </p:nvSpPr>
-        <p:spPr>
-          <a:xfrm>
-            <a:off x="7223760" y="4133088"/>
+            <a:off x="4206240" y="2578608"/>
             <a:ext cx="384048" cy="384048"/>
           </a:xfrm>
           <a:prstGeom prst="ellipse">
@@ -9903,13 +9929,13 @@
       </p:sp>
       <p:sp>
         <p:nvSpPr>
-          <p:cNvPr id="17" name="Text 13"/>
-          <p:cNvSpPr txBox="1"/>
-          <p:nvPr/>
-        </p:nvSpPr>
-        <p:spPr>
-          <a:xfrm>
-            <a:off x="7223760" y="4133088"/>
+          <p:cNvPr id="11" name="Text 8"/>
+          <p:cNvSpPr txBox="1"/>
+          <p:nvPr/>
+        </p:nvSpPr>
+        <p:spPr>
+          <a:xfrm>
+            <a:off x="4206240" y="2578608"/>
             <a:ext cx="384048" cy="384048"/>
           </a:xfrm>
           <a:prstGeom prst="rect">
@@ -9931,7 +9957,7 @@
                   <a:srgbClr val="FFFFFF"/>
                 </a:solidFill>
               </a:rPr>
-              <a:t>3</a:t>
+              <a:t>2</a:t>
             </a:r>
             <a:endParaRPr lang="en-US" sz="1600" dirty="0"/>
           </a:p>
@@ -9939,14 +9965,14 @@
       </p:sp>
       <p:sp>
         <p:nvSpPr>
-          <p:cNvPr id="18" name="Text 14"/>
-          <p:cNvSpPr txBox="1"/>
-          <p:nvPr/>
-        </p:nvSpPr>
-        <p:spPr>
-          <a:xfrm>
-            <a:off x="7772400" y="4078224"/>
-            <a:ext cx="3840480" cy="1252728"/>
+          <p:cNvPr id="12" name="Text 9"/>
+          <p:cNvSpPr txBox="1"/>
+          <p:nvPr/>
+        </p:nvSpPr>
+        <p:spPr>
+          <a:xfrm>
+            <a:off x="4754880" y="2523744"/>
+            <a:ext cx="6858000" cy="1024128"/>
           </a:xfrm>
           <a:prstGeom prst="rect">
             <a:avLst/>
@@ -9970,7 +9996,7 @@
                   <a:srgbClr val="2B3550"/>
                 </a:solidFill>
               </a:rPr>
-              <a:t>피드백 없이 수업 소개만 보내도 돼요</a:t>
+              <a:t>마지막 인사말을 골라요</a:t>
             </a:r>
             <a:endParaRPr lang="en-US" sz="1700" dirty="0"/>
           </a:p>
@@ -9987,7 +10013,241 @@
                   <a:srgbClr val="5B6680"/>
                 </a:solidFill>
               </a:rPr>
-              <a:t>체크를 안 하고 저장하면 맨 아래 칸이 빠져요</a:t>
+              <a:t>8가지 중에 고르거나 내 인사말을 추가해요 (이 기기에 남아요)</a:t>
+            </a:r>
+            <a:endParaRPr lang="en-US" sz="1700" dirty="0"/>
+          </a:p>
+        </p:txBody>
+      </p:sp>
+      <p:sp>
+        <p:nvSpPr>
+          <p:cNvPr id="13" name="num3"/>
+          <p:cNvSpPr/>
+          <p:nvPr/>
+        </p:nvSpPr>
+        <p:spPr>
+          <a:xfrm>
+            <a:off x="4206240" y="3675888"/>
+            <a:ext cx="384048" cy="384048"/>
+          </a:xfrm>
+          <a:prstGeom prst="ellipse">
+            <a:avLst/>
+          </a:prstGeom>
+          <a:solidFill>
+            <a:srgbClr val="D9533A"/>
+          </a:solidFill>
+          <a:ln w="12700">
+            <a:solidFill>
+              <a:srgbClr val="D9533A"/>
+            </a:solidFill>
+            <a:prstDash val="solid"/>
+          </a:ln>
+        </p:spPr>
+      </p:sp>
+      <p:sp>
+        <p:nvSpPr>
+          <p:cNvPr id="14" name="Text 11"/>
+          <p:cNvSpPr txBox="1"/>
+          <p:nvPr/>
+        </p:nvSpPr>
+        <p:spPr>
+          <a:xfrm>
+            <a:off x="4206240" y="3675888"/>
+            <a:ext cx="384048" cy="384048"/>
+          </a:xfrm>
+          <a:prstGeom prst="rect">
+            <a:avLst/>
+          </a:prstGeom>
+          <a:noFill/>
+          <a:ln/>
+        </p:spPr>
+        <p:txBody>
+          <a:bodyPr wrap="square" lIns="0" tIns="0" rIns="0" bIns="0" rtlCol="0" anchor="ctr"/>
+          <a:lstStyle/>
+          <a:p>
+            <a:pPr algn="ctr" indent="0" marL="0">
+              <a:buNone/>
+            </a:pPr>
+            <a:r>
+              <a:rPr lang="en-US" sz="1600" b="1" dirty="0">
+                <a:solidFill>
+                  <a:srgbClr val="FFFFFF"/>
+                </a:solidFill>
+              </a:rPr>
+              <a:t>3</a:t>
+            </a:r>
+            <a:endParaRPr lang="en-US" sz="1600" dirty="0"/>
+          </a:p>
+        </p:txBody>
+      </p:sp>
+      <p:sp>
+        <p:nvSpPr>
+          <p:cNvPr id="15" name="Text 12"/>
+          <p:cNvSpPr txBox="1"/>
+          <p:nvPr/>
+        </p:nvSpPr>
+        <p:spPr>
+          <a:xfrm>
+            <a:off x="4754880" y="3621024"/>
+            <a:ext cx="6858000" cy="1024128"/>
+          </a:xfrm>
+          <a:prstGeom prst="rect">
+            <a:avLst/>
+          </a:prstGeom>
+          <a:noFill/>
+          <a:ln/>
+        </p:spPr>
+        <p:txBody>
+          <a:bodyPr wrap="square" lIns="0" tIns="0" rIns="0" bIns="0" rtlCol="0" anchor="t"/>
+          <a:lstStyle/>
+          <a:p>
+            <a:pPr indent="0" marL="0">
+              <a:spcAft>
+                <a:spcPts val="200"/>
+              </a:spcAft>
+              <a:buNone/>
+            </a:pPr>
+            <a:r>
+              <a:rPr lang="en-US" sz="1700" b="1" dirty="0">
+                <a:solidFill>
+                  <a:srgbClr val="2B3550"/>
+                </a:solidFill>
+              </a:rPr>
+              <a:t>'다른 표현으로'를 누르면 문장이 바뀌어요</a:t>
+            </a:r>
+            <a:endParaRPr lang="en-US" sz="1700" dirty="0"/>
+          </a:p>
+          <a:p>
+            <a:pPr indent="0" marL="0">
+              <a:spcAft>
+                <a:spcPts val="200"/>
+              </a:spcAft>
+              <a:buNone/>
+            </a:pPr>
+            <a:r>
+              <a:rPr lang="en-US" sz="1400" dirty="0">
+                <a:solidFill>
+                  <a:srgbClr val="5B6680"/>
+                </a:solidFill>
+              </a:rPr>
+              <a:t>완성본을 눌러 직접 고쳐도 돼요. '다시 합치기'로 되돌려요</a:t>
+            </a:r>
+            <a:endParaRPr lang="en-US" sz="1700" dirty="0"/>
+          </a:p>
+        </p:txBody>
+      </p:sp>
+      <p:sp>
+        <p:nvSpPr>
+          <p:cNvPr id="16" name="num4"/>
+          <p:cNvSpPr/>
+          <p:nvPr/>
+        </p:nvSpPr>
+        <p:spPr>
+          <a:xfrm>
+            <a:off x="4206240" y="4773168"/>
+            <a:ext cx="384048" cy="384048"/>
+          </a:xfrm>
+          <a:prstGeom prst="ellipse">
+            <a:avLst/>
+          </a:prstGeom>
+          <a:solidFill>
+            <a:srgbClr val="D9533A"/>
+          </a:solidFill>
+          <a:ln w="12700">
+            <a:solidFill>
+              <a:srgbClr val="D9533A"/>
+            </a:solidFill>
+            <a:prstDash val="solid"/>
+          </a:ln>
+        </p:spPr>
+      </p:sp>
+      <p:sp>
+        <p:nvSpPr>
+          <p:cNvPr id="17" name="Text 14"/>
+          <p:cNvSpPr txBox="1"/>
+          <p:nvPr/>
+        </p:nvSpPr>
+        <p:spPr>
+          <a:xfrm>
+            <a:off x="4206240" y="4773168"/>
+            <a:ext cx="384048" cy="384048"/>
+          </a:xfrm>
+          <a:prstGeom prst="rect">
+            <a:avLst/>
+          </a:prstGeom>
+          <a:noFill/>
+          <a:ln/>
+        </p:spPr>
+        <p:txBody>
+          <a:bodyPr wrap="square" lIns="0" tIns="0" rIns="0" bIns="0" rtlCol="0" anchor="ctr"/>
+          <a:lstStyle/>
+          <a:p>
+            <a:pPr algn="ctr" indent="0" marL="0">
+              <a:buNone/>
+            </a:pPr>
+            <a:r>
+              <a:rPr lang="en-US" sz="1600" b="1" dirty="0">
+                <a:solidFill>
+                  <a:srgbClr val="FFFFFF"/>
+                </a:solidFill>
+              </a:rPr>
+              <a:t>4</a:t>
+            </a:r>
+            <a:endParaRPr lang="en-US" sz="1600" dirty="0"/>
+          </a:p>
+        </p:txBody>
+      </p:sp>
+      <p:sp>
+        <p:nvSpPr>
+          <p:cNvPr id="18" name="Text 15"/>
+          <p:cNvSpPr txBox="1"/>
+          <p:nvPr/>
+        </p:nvSpPr>
+        <p:spPr>
+          <a:xfrm>
+            <a:off x="4754880" y="4718304"/>
+            <a:ext cx="6858000" cy="1024128"/>
+          </a:xfrm>
+          <a:prstGeom prst="rect">
+            <a:avLst/>
+          </a:prstGeom>
+          <a:noFill/>
+          <a:ln/>
+        </p:spPr>
+        <p:txBody>
+          <a:bodyPr wrap="square" lIns="0" tIns="0" rIns="0" bIns="0" rtlCol="0" anchor="t"/>
+          <a:lstStyle/>
+          <a:p>
+            <a:pPr indent="0" marL="0">
+              <a:spcAft>
+                <a:spcPts val="200"/>
+              </a:spcAft>
+              <a:buNone/>
+            </a:pPr>
+            <a:r>
+              <a:rPr lang="en-US" sz="1700" b="1" dirty="0">
+                <a:solidFill>
+                  <a:srgbClr val="2B3550"/>
+                </a:solidFill>
+              </a:rPr>
+              <a:t>'문장 복사' → 카톡에 붙여 넣어요</a:t>
+            </a:r>
+            <a:endParaRPr lang="en-US" sz="1700" dirty="0"/>
+          </a:p>
+          <a:p>
+            <a:pPr indent="0" marL="0">
+              <a:spcAft>
+                <a:spcPts val="200"/>
+              </a:spcAft>
+              <a:buNone/>
+            </a:pPr>
+            <a:r>
+              <a:rPr lang="en-US" sz="1400" dirty="0">
+                <a:solidFill>
+                  <a:srgbClr val="5B6680"/>
+                </a:solidFill>
+              </a:rPr>
+              <a:t>'반 전체 완성본 모아 보기'에서 학생별로, 또는 한 번에 복사해요</a:t>
             </a:r>
             <a:endParaRPr lang="en-US" sz="1700" dirty="0"/>
           </a:p>
@@ -10001,12 +10261,12 @@
         </p:nvSpPr>
         <p:spPr>
           <a:xfrm>
-            <a:off x="7223760" y="5440680"/>
-            <a:ext cx="4389120" cy="731520"/>
+            <a:off x="4206240" y="5623560"/>
+            <a:ext cx="7406640" cy="548640"/>
           </a:xfrm>
           <a:prstGeom prst="roundRect">
             <a:avLst>
-              <a:gd name="adj" fmla="val 17500"/>
+              <a:gd name="adj" fmla="val 23333"/>
             </a:avLst>
           </a:prstGeom>
           <a:solidFill>
@@ -10022,14 +10282,14 @@
       </p:sp>
       <p:sp>
         <p:nvSpPr>
-          <p:cNvPr id="20" name="Text 16"/>
-          <p:cNvSpPr txBox="1"/>
-          <p:nvPr/>
-        </p:nvSpPr>
-        <p:spPr>
-          <a:xfrm>
-            <a:off x="7406640" y="5440680"/>
-            <a:ext cx="4023360" cy="731520"/>
+          <p:cNvPr id="20" name="Text 17"/>
+          <p:cNvSpPr txBox="1"/>
+          <p:nvPr/>
+        </p:nvSpPr>
+        <p:spPr>
+          <a:xfrm>
+            <a:off x="4389120" y="5623560"/>
+            <a:ext cx="7132320" cy="548640"/>
           </a:xfrm>
           <a:prstGeom prst="rect">
             <a:avLst/>
@@ -10050,7 +10310,7 @@
                   <a:srgbClr val="1F2A4A"/>
                 </a:solidFill>
               </a:rPr>
-              <a:t>체크한 내용은 저장되지 않아요. 다른 학생을 고르면 새로 시작해요.</a:t>
+              <a:t>미리 만들어 둔 문장이라 Claude 사용량이 들지 않아요.</a:t>
             </a:r>
             <a:endParaRPr lang="en-US" sz="1200" dirty="0"/>
           </a:p>
@@ -10522,7 +10782,7 @@
                   <a:srgbClr val="5B6680"/>
                 </a:solidFill>
               </a:rPr>
-              <a:t>이번 달 수업 소개 + 학생별 피드백 이미지</a:t>
+              <a:t>반 공통 + 학생별 피드백 문장과 이미지</a:t>
             </a:r>
             <a:endParaRPr lang="en-US" sz="1600" dirty="0"/>
           </a:p>
@@ -10836,6 +11096,703 @@
         </p:nvSpPr>
         <p:spPr>
           <a:xfrm>
+            <a:off x="548640" y="384048"/>
+            <a:ext cx="9692640" cy="685800"/>
+          </a:xfrm>
+          <a:prstGeom prst="rect">
+            <a:avLst/>
+          </a:prstGeom>
+          <a:noFill/>
+          <a:ln/>
+        </p:spPr>
+        <p:txBody>
+          <a:bodyPr wrap="square" lIns="0" tIns="0" rIns="0" bIns="0" rtlCol="0" anchor="ctr"/>
+          <a:lstStyle/>
+          <a:p>
+            <a:pPr algn="l" indent="0" marL="0">
+              <a:buNone/>
+            </a:pPr>
+            <a:r>
+              <a:rPr lang="en-US" sz="3000" b="1" dirty="0">
+                <a:solidFill>
+                  <a:schemeClr val="tx2"/>
+                </a:solidFill>
+              </a:rPr>
+              <a:t>이미지로 저장해서 보내요</a:t>
+            </a:r>
+            <a:endParaRPr lang="en-US" sz="3000" dirty="0"/>
+          </a:p>
+        </p:txBody>
+      </p:sp>
+      <p:sp>
+        <p:nvSpPr>
+          <p:cNvPr id="3" name="Shape 1"/>
+          <p:cNvSpPr/>
+          <p:nvPr/>
+        </p:nvSpPr>
+        <p:spPr>
+          <a:xfrm>
+            <a:off x="10241280" y="457200"/>
+            <a:ext cx="1417320" cy="438912"/>
+          </a:xfrm>
+          <a:prstGeom prst="roundRect">
+            <a:avLst>
+              <a:gd name="adj" fmla="val 50000"/>
+            </a:avLst>
+          </a:prstGeom>
+          <a:solidFill>
+            <a:srgbClr val="EAF1FC"/>
+          </a:solidFill>
+          <a:ln w="12700">
+            <a:solidFill>
+              <a:srgbClr val="EAF1FC"/>
+            </a:solidFill>
+            <a:prstDash val="solid"/>
+          </a:ln>
+        </p:spPr>
+      </p:sp>
+      <p:sp>
+        <p:nvSpPr>
+          <p:cNvPr id="4" name="Text 2"/>
+          <p:cNvSpPr txBox="1"/>
+          <p:nvPr/>
+        </p:nvSpPr>
+        <p:spPr>
+          <a:xfrm>
+            <a:off x="10241280" y="457200"/>
+            <a:ext cx="1417320" cy="438912"/>
+          </a:xfrm>
+          <a:prstGeom prst="rect">
+            <a:avLst/>
+          </a:prstGeom>
+          <a:noFill/>
+          <a:ln/>
+        </p:spPr>
+        <p:txBody>
+          <a:bodyPr wrap="square" lIns="0" tIns="0" rIns="0" bIns="0" rtlCol="0" anchor="ctr"/>
+          <a:lstStyle/>
+          <a:p>
+            <a:pPr algn="ctr" indent="0" marL="0">
+              <a:buNone/>
+            </a:pPr>
+            <a:r>
+              <a:rPr lang="en-US" sz="1400" b="1" dirty="0">
+                <a:solidFill>
+                  <a:srgbClr val="4A7BD0"/>
+                </a:solidFill>
+              </a:rPr>
+              <a:t>4단계</a:t>
+            </a:r>
+            <a:endParaRPr lang="en-US" sz="1400" dirty="0"/>
+          </a:p>
+        </p:txBody>
+      </p:sp>
+      <p:sp>
+        <p:nvSpPr>
+          <p:cNvPr id="5" name="Shape 3"/>
+          <p:cNvSpPr/>
+          <p:nvPr/>
+        </p:nvSpPr>
+        <p:spPr>
+          <a:xfrm>
+            <a:off x="658368" y="1298448"/>
+            <a:ext cx="2532367" cy="4855464"/>
+          </a:xfrm>
+          <a:prstGeom prst="roundRect">
+            <a:avLst>
+              <a:gd name="adj" fmla="val 4333"/>
+            </a:avLst>
+          </a:prstGeom>
+          <a:solidFill>
+            <a:srgbClr val="FFFFFF"/>
+          </a:solidFill>
+          <a:ln w="12700">
+            <a:solidFill>
+              <a:srgbClr val="C9D0DC"/>
+            </a:solidFill>
+            <a:prstDash val="solid"/>
+          </a:ln>
+          <a:effectLst>
+            <a:outerShdw sx="100000" sy="100000" kx="0" ky="0" algn="bl" rotWithShape="0" blurRad="101600" dist="38100" dir="5400000">
+              <a:srgbClr val="1F2A4A">
+                <a:alpha val="18000"/>
+              </a:srgbClr>
+            </a:outerShdw>
+          </a:effectLst>
+        </p:spPr>
+      </p:sp>
+      <p:pic>
+        <p:nvPicPr>
+          <p:cNvPr id="6" name="Image 0" descr="피드백이 들어간 이미지">    </p:cNvPr>
+          <p:cNvPicPr>
+            <a:picLocks noChangeAspect="1"/>
+          </p:cNvPicPr>
+          <p:nvPr/>
+        </p:nvPicPr>
+        <p:blipFill>
+          <a:blip r:embed="rId1"/>
+          <a:stretch>
+            <a:fillRect/>
+          </a:stretch>
+        </p:blipFill>
+        <p:spPr>
+          <a:xfrm>
+            <a:off x="731520" y="1371600"/>
+            <a:ext cx="2386063" cy="4709160"/>
+          </a:xfrm>
+          <a:prstGeom prst="rect">
+            <a:avLst/>
+          </a:prstGeom>
+        </p:spPr>
+      </p:pic>
+      <p:sp>
+        <p:nvSpPr>
+          <p:cNvPr id="7" name="num1"/>
+          <p:cNvSpPr/>
+          <p:nvPr/>
+        </p:nvSpPr>
+        <p:spPr>
+          <a:xfrm>
+            <a:off x="3931920" y="1481328"/>
+            <a:ext cx="384048" cy="384048"/>
+          </a:xfrm>
+          <a:prstGeom prst="ellipse">
+            <a:avLst/>
+          </a:prstGeom>
+          <a:solidFill>
+            <a:srgbClr val="D9533A"/>
+          </a:solidFill>
+          <a:ln w="12700">
+            <a:solidFill>
+              <a:srgbClr val="D9533A"/>
+            </a:solidFill>
+            <a:prstDash val="solid"/>
+          </a:ln>
+        </p:spPr>
+      </p:sp>
+      <p:sp>
+        <p:nvSpPr>
+          <p:cNvPr id="8" name="Text 5"/>
+          <p:cNvSpPr txBox="1"/>
+          <p:nvPr/>
+        </p:nvSpPr>
+        <p:spPr>
+          <a:xfrm>
+            <a:off x="3931920" y="1481328"/>
+            <a:ext cx="384048" cy="384048"/>
+          </a:xfrm>
+          <a:prstGeom prst="rect">
+            <a:avLst/>
+          </a:prstGeom>
+          <a:noFill/>
+          <a:ln/>
+        </p:spPr>
+        <p:txBody>
+          <a:bodyPr wrap="square" lIns="0" tIns="0" rIns="0" bIns="0" rtlCol="0" anchor="ctr"/>
+          <a:lstStyle/>
+          <a:p>
+            <a:pPr algn="ctr" indent="0" marL="0">
+              <a:buNone/>
+            </a:pPr>
+            <a:r>
+              <a:rPr lang="en-US" sz="1600" b="1" dirty="0">
+                <a:solidFill>
+                  <a:srgbClr val="FFFFFF"/>
+                </a:solidFill>
+              </a:rPr>
+              <a:t>1</a:t>
+            </a:r>
+            <a:endParaRPr lang="en-US" sz="1600" dirty="0"/>
+          </a:p>
+        </p:txBody>
+      </p:sp>
+      <p:sp>
+        <p:nvSpPr>
+          <p:cNvPr id="9" name="Text 6"/>
+          <p:cNvSpPr txBox="1"/>
+          <p:nvPr/>
+        </p:nvSpPr>
+        <p:spPr>
+          <a:xfrm>
+            <a:off x="4480560" y="1426464"/>
+            <a:ext cx="7132320" cy="1069848"/>
+          </a:xfrm>
+          <a:prstGeom prst="rect">
+            <a:avLst/>
+          </a:prstGeom>
+          <a:noFill/>
+          <a:ln/>
+        </p:spPr>
+        <p:txBody>
+          <a:bodyPr wrap="square" lIns="0" tIns="0" rIns="0" bIns="0" rtlCol="0" anchor="t"/>
+          <a:lstStyle/>
+          <a:p>
+            <a:pPr indent="0" marL="0">
+              <a:spcAft>
+                <a:spcPts val="200"/>
+              </a:spcAft>
+              <a:buNone/>
+            </a:pPr>
+            <a:r>
+              <a:rPr lang="en-US" sz="1700" b="1" dirty="0">
+                <a:solidFill>
+                  <a:srgbClr val="2B3550"/>
+                </a:solidFill>
+              </a:rPr>
+              <a:t>'이미지 저장'을 눌러요</a:t>
+            </a:r>
+            <a:endParaRPr lang="en-US" sz="1700" dirty="0"/>
+          </a:p>
+          <a:p>
+            <a:pPr indent="0" marL="0">
+              <a:spcAft>
+                <a:spcPts val="200"/>
+              </a:spcAft>
+              <a:buNone/>
+            </a:pPr>
+            <a:r>
+              <a:rPr lang="en-US" sz="1400" dirty="0">
+                <a:solidFill>
+                  <a:srgbClr val="5B6680"/>
+                </a:solidFill>
+              </a:rPr>
+              <a:t>이번 달 수업 소개와 학생 피드백이 한 장에 들어가요</a:t>
+            </a:r>
+            <a:endParaRPr lang="en-US" sz="1700" dirty="0"/>
+          </a:p>
+        </p:txBody>
+      </p:sp>
+      <p:sp>
+        <p:nvSpPr>
+          <p:cNvPr id="10" name="num2"/>
+          <p:cNvSpPr/>
+          <p:nvPr/>
+        </p:nvSpPr>
+        <p:spPr>
+          <a:xfrm>
+            <a:off x="3931920" y="2624328"/>
+            <a:ext cx="384048" cy="384048"/>
+          </a:xfrm>
+          <a:prstGeom prst="ellipse">
+            <a:avLst/>
+          </a:prstGeom>
+          <a:solidFill>
+            <a:srgbClr val="D9533A"/>
+          </a:solidFill>
+          <a:ln w="12700">
+            <a:solidFill>
+              <a:srgbClr val="D9533A"/>
+            </a:solidFill>
+            <a:prstDash val="solid"/>
+          </a:ln>
+        </p:spPr>
+      </p:sp>
+      <p:sp>
+        <p:nvSpPr>
+          <p:cNvPr id="11" name="Text 8"/>
+          <p:cNvSpPr txBox="1"/>
+          <p:nvPr/>
+        </p:nvSpPr>
+        <p:spPr>
+          <a:xfrm>
+            <a:off x="3931920" y="2624328"/>
+            <a:ext cx="384048" cy="384048"/>
+          </a:xfrm>
+          <a:prstGeom prst="rect">
+            <a:avLst/>
+          </a:prstGeom>
+          <a:noFill/>
+          <a:ln/>
+        </p:spPr>
+        <p:txBody>
+          <a:bodyPr wrap="square" lIns="0" tIns="0" rIns="0" bIns="0" rtlCol="0" anchor="ctr"/>
+          <a:lstStyle/>
+          <a:p>
+            <a:pPr algn="ctr" indent="0" marL="0">
+              <a:buNone/>
+            </a:pPr>
+            <a:r>
+              <a:rPr lang="en-US" sz="1600" b="1" dirty="0">
+                <a:solidFill>
+                  <a:srgbClr val="FFFFFF"/>
+                </a:solidFill>
+              </a:rPr>
+              <a:t>2</a:t>
+            </a:r>
+            <a:endParaRPr lang="en-US" sz="1600" dirty="0"/>
+          </a:p>
+        </p:txBody>
+      </p:sp>
+      <p:sp>
+        <p:nvSpPr>
+          <p:cNvPr id="12" name="Text 9"/>
+          <p:cNvSpPr txBox="1"/>
+          <p:nvPr/>
+        </p:nvSpPr>
+        <p:spPr>
+          <a:xfrm>
+            <a:off x="4480560" y="2569464"/>
+            <a:ext cx="7132320" cy="1069848"/>
+          </a:xfrm>
+          <a:prstGeom prst="rect">
+            <a:avLst/>
+          </a:prstGeom>
+          <a:noFill/>
+          <a:ln/>
+        </p:spPr>
+        <p:txBody>
+          <a:bodyPr wrap="square" lIns="0" tIns="0" rIns="0" bIns="0" rtlCol="0" anchor="t"/>
+          <a:lstStyle/>
+          <a:p>
+            <a:pPr indent="0" marL="0">
+              <a:spcAft>
+                <a:spcPts val="200"/>
+              </a:spcAft>
+              <a:buNone/>
+            </a:pPr>
+            <a:r>
+              <a:rPr lang="en-US" sz="1700" b="1" dirty="0">
+                <a:solidFill>
+                  <a:srgbClr val="2B3550"/>
+                </a:solidFill>
+              </a:rPr>
+              <a:t>휴대폰에서는</a:t>
+            </a:r>
+            <a:endParaRPr lang="en-US" sz="1700" dirty="0"/>
+          </a:p>
+          <a:p>
+            <a:pPr indent="0" marL="0">
+              <a:spcAft>
+                <a:spcPts val="200"/>
+              </a:spcAft>
+              <a:buNone/>
+            </a:pPr>
+            <a:r>
+              <a:rPr lang="en-US" sz="1400" dirty="0">
+                <a:solidFill>
+                  <a:srgbClr val="5B6680"/>
+                </a:solidFill>
+              </a:rPr>
+              <a:t>공유 창에서 사진에 저장해요. 안 되면 그림이 크게 뜨니 길게 눌러 저장해요</a:t>
+            </a:r>
+            <a:endParaRPr lang="en-US" sz="1700" dirty="0"/>
+          </a:p>
+        </p:txBody>
+      </p:sp>
+      <p:sp>
+        <p:nvSpPr>
+          <p:cNvPr id="13" name="num3"/>
+          <p:cNvSpPr/>
+          <p:nvPr/>
+        </p:nvSpPr>
+        <p:spPr>
+          <a:xfrm>
+            <a:off x="3931920" y="3767328"/>
+            <a:ext cx="384048" cy="384048"/>
+          </a:xfrm>
+          <a:prstGeom prst="ellipse">
+            <a:avLst/>
+          </a:prstGeom>
+          <a:solidFill>
+            <a:srgbClr val="D9533A"/>
+          </a:solidFill>
+          <a:ln w="12700">
+            <a:solidFill>
+              <a:srgbClr val="D9533A"/>
+            </a:solidFill>
+            <a:prstDash val="solid"/>
+          </a:ln>
+        </p:spPr>
+      </p:sp>
+      <p:sp>
+        <p:nvSpPr>
+          <p:cNvPr id="14" name="Text 11"/>
+          <p:cNvSpPr txBox="1"/>
+          <p:nvPr/>
+        </p:nvSpPr>
+        <p:spPr>
+          <a:xfrm>
+            <a:off x="3931920" y="3767328"/>
+            <a:ext cx="384048" cy="384048"/>
+          </a:xfrm>
+          <a:prstGeom prst="rect">
+            <a:avLst/>
+          </a:prstGeom>
+          <a:noFill/>
+          <a:ln/>
+        </p:spPr>
+        <p:txBody>
+          <a:bodyPr wrap="square" lIns="0" tIns="0" rIns="0" bIns="0" rtlCol="0" anchor="ctr"/>
+          <a:lstStyle/>
+          <a:p>
+            <a:pPr algn="ctr" indent="0" marL="0">
+              <a:buNone/>
+            </a:pPr>
+            <a:r>
+              <a:rPr lang="en-US" sz="1600" b="1" dirty="0">
+                <a:solidFill>
+                  <a:srgbClr val="FFFFFF"/>
+                </a:solidFill>
+              </a:rPr>
+              <a:t>3</a:t>
+            </a:r>
+            <a:endParaRPr lang="en-US" sz="1600" dirty="0"/>
+          </a:p>
+        </p:txBody>
+      </p:sp>
+      <p:sp>
+        <p:nvSpPr>
+          <p:cNvPr id="15" name="Text 12"/>
+          <p:cNvSpPr txBox="1"/>
+          <p:nvPr/>
+        </p:nvSpPr>
+        <p:spPr>
+          <a:xfrm>
+            <a:off x="4480560" y="3712464"/>
+            <a:ext cx="7132320" cy="1069848"/>
+          </a:xfrm>
+          <a:prstGeom prst="rect">
+            <a:avLst/>
+          </a:prstGeom>
+          <a:noFill/>
+          <a:ln/>
+        </p:spPr>
+        <p:txBody>
+          <a:bodyPr wrap="square" lIns="0" tIns="0" rIns="0" bIns="0" rtlCol="0" anchor="t"/>
+          <a:lstStyle/>
+          <a:p>
+            <a:pPr indent="0" marL="0">
+              <a:spcAft>
+                <a:spcPts val="200"/>
+              </a:spcAft>
+              <a:buNone/>
+            </a:pPr>
+            <a:r>
+              <a:rPr lang="en-US" sz="1700" b="1" dirty="0">
+                <a:solidFill>
+                  <a:srgbClr val="2B3550"/>
+                </a:solidFill>
+              </a:rPr>
+              <a:t>차시 하나만 보내려면</a:t>
+            </a:r>
+            <a:endParaRPr lang="en-US" sz="1700" dirty="0"/>
+          </a:p>
+          <a:p>
+            <a:pPr indent="0" marL="0">
+              <a:spcAft>
+                <a:spcPts val="200"/>
+              </a:spcAft>
+              <a:buNone/>
+            </a:pPr>
+            <a:r>
+              <a:rPr lang="en-US" sz="1400" dirty="0">
+                <a:solidFill>
+                  <a:srgbClr val="5B6680"/>
+                </a:solidFill>
+              </a:rPr>
+              <a:t>'과정·월 직접 고르기'의 보낼 범위에서 차시를 골라요</a:t>
+            </a:r>
+            <a:endParaRPr lang="en-US" sz="1700" dirty="0"/>
+          </a:p>
+        </p:txBody>
+      </p:sp>
+      <p:sp>
+        <p:nvSpPr>
+          <p:cNvPr id="16" name="num4"/>
+          <p:cNvSpPr/>
+          <p:nvPr/>
+        </p:nvSpPr>
+        <p:spPr>
+          <a:xfrm>
+            <a:off x="3931920" y="4910328"/>
+            <a:ext cx="384048" cy="384048"/>
+          </a:xfrm>
+          <a:prstGeom prst="ellipse">
+            <a:avLst/>
+          </a:prstGeom>
+          <a:solidFill>
+            <a:srgbClr val="D9533A"/>
+          </a:solidFill>
+          <a:ln w="12700">
+            <a:solidFill>
+              <a:srgbClr val="D9533A"/>
+            </a:solidFill>
+            <a:prstDash val="solid"/>
+          </a:ln>
+        </p:spPr>
+      </p:sp>
+      <p:sp>
+        <p:nvSpPr>
+          <p:cNvPr id="17" name="Text 14"/>
+          <p:cNvSpPr txBox="1"/>
+          <p:nvPr/>
+        </p:nvSpPr>
+        <p:spPr>
+          <a:xfrm>
+            <a:off x="3931920" y="4910328"/>
+            <a:ext cx="384048" cy="384048"/>
+          </a:xfrm>
+          <a:prstGeom prst="rect">
+            <a:avLst/>
+          </a:prstGeom>
+          <a:noFill/>
+          <a:ln/>
+        </p:spPr>
+        <p:txBody>
+          <a:bodyPr wrap="square" lIns="0" tIns="0" rIns="0" bIns="0" rtlCol="0" anchor="ctr"/>
+          <a:lstStyle/>
+          <a:p>
+            <a:pPr algn="ctr" indent="0" marL="0">
+              <a:buNone/>
+            </a:pPr>
+            <a:r>
+              <a:rPr lang="en-US" sz="1600" b="1" dirty="0">
+                <a:solidFill>
+                  <a:srgbClr val="FFFFFF"/>
+                </a:solidFill>
+              </a:rPr>
+              <a:t>4</a:t>
+            </a:r>
+            <a:endParaRPr lang="en-US" sz="1600" dirty="0"/>
+          </a:p>
+        </p:txBody>
+      </p:sp>
+      <p:sp>
+        <p:nvSpPr>
+          <p:cNvPr id="18" name="Text 15"/>
+          <p:cNvSpPr txBox="1"/>
+          <p:nvPr/>
+        </p:nvSpPr>
+        <p:spPr>
+          <a:xfrm>
+            <a:off x="4480560" y="4855464"/>
+            <a:ext cx="7132320" cy="1069848"/>
+          </a:xfrm>
+          <a:prstGeom prst="rect">
+            <a:avLst/>
+          </a:prstGeom>
+          <a:noFill/>
+          <a:ln/>
+        </p:spPr>
+        <p:txBody>
+          <a:bodyPr wrap="square" lIns="0" tIns="0" rIns="0" bIns="0" rtlCol="0" anchor="t"/>
+          <a:lstStyle/>
+          <a:p>
+            <a:pPr indent="0" marL="0">
+              <a:spcAft>
+                <a:spcPts val="200"/>
+              </a:spcAft>
+              <a:buNone/>
+            </a:pPr>
+            <a:r>
+              <a:rPr lang="en-US" sz="1700" b="1" dirty="0">
+                <a:solidFill>
+                  <a:srgbClr val="2B3550"/>
+                </a:solidFill>
+              </a:rPr>
+              <a:t>피드백 없이 수업 소개만 보내도 돼요</a:t>
+            </a:r>
+            <a:endParaRPr lang="en-US" sz="1700" dirty="0"/>
+          </a:p>
+          <a:p>
+            <a:pPr indent="0" marL="0">
+              <a:spcAft>
+                <a:spcPts val="200"/>
+              </a:spcAft>
+              <a:buNone/>
+            </a:pPr>
+            <a:r>
+              <a:rPr lang="en-US" sz="1400" dirty="0">
+                <a:solidFill>
+                  <a:srgbClr val="5B6680"/>
+                </a:solidFill>
+              </a:rPr>
+              <a:t>공통·개인 피드백이 비어 있으면 맨 아래 칸이 빠져요</a:t>
+            </a:r>
+            <a:endParaRPr lang="en-US" sz="1700" dirty="0"/>
+          </a:p>
+        </p:txBody>
+      </p:sp>
+      <p:sp>
+        <p:nvSpPr>
+          <p:cNvPr id="25" name="Slide Number Placeholder 0"/>
+          <p:cNvSpPr>
+            <a:spLocks noGrp="1"/>
+          </p:cNvSpPr>
+          <p:nvPr>
+            <p:ph type="sldNum" sz="quarter" idx="4294967295"/>
+          </p:nvPr>
+        </p:nvSpPr>
+        <p:spPr>
+          <a:xfrm>
+            <a:off x="11247120" y="6400800"/>
+            <a:ext cx="457200" cy="274320"/>
+          </a:xfrm>
+          <a:prstGeom prst="rect">
+            <a:avLst/>
+          </a:prstGeom>
+          <a:extLst>
+            <a:ext uri="{C572A759-6A51-4108-AA02-DFA0A04FC94B}">
+              <ma14:wrappingTextBoxFlag xmlns:ma14="http://schemas.microsoft.com/office/mac/drawingml/2011/main" val="0"/>
+            </a:ext>
+          </a:extLst>
+        </p:spPr>
+        <p:txBody>
+          <a:bodyPr/>
+          <a:lstStyle>
+            <a:lvl1pPr>
+              <a:defRPr sz="1000">
+                <a:solidFill>
+                  <a:srgbClr val="8A94AA"/>
+                </a:solidFill>
+              </a:defRPr>
+            </a:lvl1pPr>
+          </a:lstStyle>
+          <a:p>
+            <a:pPr algn="r"/>
+            <a:fld id="{F7021451-1387-4CA6-816F-3879F97B5CBC}" type="slidenum">
+              <a:rPr b="0" lang="en-US"/>
+              <a:t>20</a:t>
+            </a:fld>
+            <a:endParaRPr lang="en-US"/>
+          </a:p>
+        </p:txBody>
+      </p:sp>
+    </p:spTree>
+  </p:cSld>
+  <p:clrMapOvr>
+    <a:masterClrMapping/>
+  </p:clrMapOvr>
+</p:sld>
+</file>
+
+<file path=ppt/slides/slide21.xml><?xml version="1.0" encoding="utf-8"?>
+<p:sld xmlns:a="http://schemas.openxmlformats.org/drawingml/2006/main" xmlns:r="http://schemas.openxmlformats.org/officeDocument/2006/relationships" xmlns:p="http://schemas.openxmlformats.org/presentationml/2006/main">
+  <p:cSld name="Slide 21">
+    <p:spTree>
+      <p:nvGrpSpPr>
+        <p:cNvPr id="1" name=""/>
+        <p:cNvGrpSpPr/>
+        <p:nvPr/>
+      </p:nvGrpSpPr>
+      <p:grpSpPr>
+        <a:xfrm>
+          <a:off x="0" y="0"/>
+          <a:ext cx="0" cy="0"/>
+          <a:chOff x="0" y="0"/>
+          <a:chExt cx="0" cy="0"/>
+        </a:xfrm>
+      </p:grpSpPr>
+      <p:sp>
+        <p:nvSpPr>
+          <p:cNvPr id="2" name="Text 0"/>
+          <p:cNvSpPr/>
+          <p:nvPr>
+            <p:ph idx="100" type="title" hasCustomPrompt="1"/>
+          </p:nvPr>
+        </p:nvSpPr>
+        <p:spPr>
+          <a:xfrm>
             <a:off x="640080" y="1417320"/>
             <a:ext cx="10881360" cy="914400"/>
           </a:xfrm>
@@ -11168,11 +12125,11 @@
         <p:spPr>
           <a:xfrm>
             <a:off x="658368" y="1389888"/>
-            <a:ext cx="5266944" cy="5023104"/>
+            <a:ext cx="5266944" cy="5388864"/>
           </a:xfrm>
           <a:prstGeom prst="roundRect">
             <a:avLst>
-              <a:gd name="adj" fmla="val 2184"/>
+              <a:gd name="adj" fmla="val 2083"/>
             </a:avLst>
           </a:prstGeom>
           <a:solidFill>
@@ -11210,7 +12167,7 @@
         <p:spPr>
           <a:xfrm>
             <a:off x="731520" y="1463040"/>
-            <a:ext cx="5120640" cy="4876800"/>
+            <a:ext cx="5120640" cy="5242560"/>
           </a:xfrm>
           <a:prstGeom prst="rect">
             <a:avLst/>
@@ -11428,7 +12385,7 @@
                   <a:srgbClr val="5B6680"/>
                 </a:solidFill>
               </a:rPr>
-              <a:t>반 명단 엑셀은 이름으로 적는 것과 팀 이름으로 적는 것 두 가지예요</a:t>
+              <a:t>반 명단 엑셀(이름으로 적기·팀 이름으로 적기), 숙제 엑셀(빈칸), HTML 파일 하나</a:t>
             </a:r>
             <a:endParaRPr lang="en-US" sz="1700" dirty="0"/>
           </a:p>
@@ -11608,7 +12565,7 @@
                   <a:srgbClr val="1F2A4A"/>
                 </a:solidFill>
               </a:rPr>
-              <a:t>컴퓨터에서 받으면 편해요. 휴대폰에서는 받은 파일을 엑셀 앱으로 열어 고쳐요.</a:t>
+              <a:t>받은 파일 이름이 메뉴 이름과 같아요. 컴퓨터에서 받으면 편하고, 휴대폰에서는 엑셀 앱으로 열어 고쳐요.</a:t>
             </a:r>
             <a:endParaRPr lang="en-US" sz="1300" dirty="0"/>
           </a:p>
@@ -12754,7 +13711,7 @@
                   <a:srgbClr val="2B3550"/>
                 </a:solidFill>
               </a:rPr>
-              <a:t>이름만 한 줄씩 적고 No·팀 여부·수업요일·단계·수업일 칸은 합쳐(병합) 주세요</a:t>
+              <a:t>둘째 줄부터 이름만 적고 나머지 칸은 비워 둬요. No 칸을 합쳐도 돼요</a:t>
             </a:r>
             <a:endParaRPr lang="en-US" sz="1300" dirty="0"/>
           </a:p>
@@ -12853,7 +13810,7 @@
                   <a:srgbClr val="2B3550"/>
                 </a:solidFill>
               </a:rPr>
-              <a:t>'11월 2일, 9일, 16일'처럼 적어요. 달이 바뀌면 '11월 30일, 12월 2일'</a:t>
+              <a:t>'11월 2일, 9일'처럼 적어요. 10월 수업이면 10월 책, 11월이면 11월 책이 자동으로 들어가요</a:t>
             </a:r>
             <a:endParaRPr lang="en-US" sz="1300" dirty="0"/>
           </a:p>
@@ -12988,7 +13945,7 @@
                   <a:srgbClr val="5B6680"/>
                 </a:solidFill>
               </a:rPr>
-              <a:t>첫 줄 제목(No, 팀 여부, 이름, 수업요일, 단계, 수업일, 특이사항)은 그대로 두세요</a:t>
+              <a:t>첫 줄 제목(No, 팀 여부, 이름, 수업요일, 단계, 수업일, 특이사항, 인원)은 그대로 두세요</a:t>
             </a:r>
             <a:endParaRPr lang="en-US" sz="1300" dirty="0"/>
           </a:p>
@@ -14567,11 +15524,11 @@
         <p:spPr>
           <a:xfrm>
             <a:off x="4910328" y="1298448"/>
-            <a:ext cx="3192484" cy="3438144"/>
+            <a:ext cx="3371642" cy="2706624"/>
           </a:xfrm>
           <a:prstGeom prst="roundRect">
             <a:avLst>
-              <a:gd name="adj" fmla="val 3437"/>
+              <a:gd name="adj" fmla="val 4054"/>
             </a:avLst>
           </a:prstGeom>
           <a:solidFill>
@@ -14609,7 +15566,7 @@
         <p:spPr>
           <a:xfrm>
             <a:off x="4983480" y="1371600"/>
-            <a:ext cx="3046180" cy="3291840"/>
+            <a:ext cx="3225338" cy="2560320"/>
           </a:xfrm>
           <a:prstGeom prst="rect">
             <a:avLst/>
@@ -14624,12 +15581,12 @@
         </p:nvSpPr>
         <p:spPr>
           <a:xfrm>
-            <a:off x="8156448" y="1298448"/>
-            <a:ext cx="2980944" cy="3438144"/>
+            <a:off x="8385048" y="1298448"/>
+            <a:ext cx="3094091" cy="2706624"/>
           </a:xfrm>
           <a:prstGeom prst="roundRect">
             <a:avLst>
-              <a:gd name="adj" fmla="val 3681"/>
+              <a:gd name="adj" fmla="val 4054"/>
             </a:avLst>
           </a:prstGeom>
           <a:solidFill>
@@ -14666,8 +15623,8 @@
         </p:blipFill>
         <p:spPr>
           <a:xfrm>
-            <a:off x="8229600" y="1371600"/>
-            <a:ext cx="2834640" cy="3291840"/>
+            <a:off x="8458200" y="1371600"/>
+            <a:ext cx="2947787" cy="2560320"/>
           </a:xfrm>
           <a:prstGeom prst="rect">
             <a:avLst/>

--- a/forms/한우리_수업도우미_사용안내.pptx
+++ b/forms/한우리_수업도우미_사용안내.pptx
@@ -9504,7 +9504,7 @@
                   <a:srgbClr val="5B6680"/>
                 </a:solidFill>
               </a:rPr>
-              <a:t>'학생 이름 없이 쓰기'로 쓰거나 이름을 추가해요</a:t>
+              <a:t>'학생 이름 없이 쓰기'로 쓰고, '지우고 다음 친구 쓰기'로 넘어가요</a:t>
             </a:r>
             <a:endParaRPr lang="en-US" sz="1600" dirty="0"/>
           </a:p>
@@ -9567,7 +9567,7 @@
                   <a:srgbClr val="2B3550"/>
                 </a:solidFill>
               </a:rPr>
-              <a:t>적은 내용은 이 기기 브라우저에 남아서, 다음에 열어도 그대로예요.</a:t>
+              <a:t>피드백은 저장되지 않아요. 새로고침하면 지워지니 복사하거나 이미지로 저장해요.</a:t>
             </a:r>
             <a:endParaRPr lang="en-US" sz="1200" dirty="0"/>
           </a:p>

--- a/forms/한우리_수업도우미_사용안내.pptx
+++ b/forms/한우리_수업도우미_사용안내.pptx
@@ -6294,7 +6294,7 @@
                   <a:srgbClr val="2B3550"/>
                 </a:solidFill>
               </a:rPr>
-              <a:t>장 수 = 학생 수</a:t>
+              <a:t>학생 수만 맞춰요</a:t>
             </a:r>
             <a:endParaRPr lang="en-US" sz="1700" dirty="0"/>
           </a:p>
@@ -6311,7 +6311,7 @@
                   <a:srgbClr val="5B6680"/>
                 </a:solidFill>
               </a:rPr>
-              <a:t>A4 한 장에 두 개씩 들어가요</a:t>
+              <a:t>A4 한 장에 두 개씩 들어가서 2명당 1장만 인쇄돼요 (3명이면 2장)</a:t>
             </a:r>
             <a:endParaRPr lang="en-US" sz="1700" dirty="0"/>
           </a:p>
@@ -6791,11 +6791,11 @@
         <p:spPr>
           <a:xfrm>
             <a:off x="658368" y="1298448"/>
-            <a:ext cx="3986784" cy="2729720"/>
+            <a:ext cx="3986784" cy="3125645"/>
           </a:xfrm>
           <a:prstGeom prst="roundRect">
             <a:avLst>
-              <a:gd name="adj" fmla="val 4020"/>
+              <a:gd name="adj" fmla="val 3511"/>
             </a:avLst>
           </a:prstGeom>
           <a:solidFill>
@@ -6833,7 +6833,7 @@
         <p:spPr>
           <a:xfrm>
             <a:off x="731520" y="1371600"/>
-            <a:ext cx="3840480" cy="2583416"/>
+            <a:ext cx="3840480" cy="2979341"/>
           </a:xfrm>
           <a:prstGeom prst="rect">
             <a:avLst/>
@@ -6951,7 +6951,7 @@
                   <a:srgbClr val="5B6680"/>
                 </a:solidFill>
               </a:rPr>
-              <a:t>모든 반이 파일 하나에. 한 번에 인쇄해요</a:t>
+              <a:t>반마다 필요한 장 수만 들어 있어요. 한 부만 인쇄해요</a:t>
             </a:r>
             <a:endParaRPr lang="en-US" sz="1400" dirty="0"/>
           </a:p>

--- a/forms/한우리_수업도우미_사용안내.pptx
+++ b/forms/한우리_수업도우미_사용안내.pptx
@@ -13873,7 +13873,7 @@
                   <a:srgbClr val="4A7BD0"/>
                 </a:solidFill>
               </a:rPr>
-              <a:t>수업요일</a:t>
+              <a:t>수업월호</a:t>
             </a:r>
             <a:endParaRPr lang="en-US" sz="1600" dirty="0"/>
           </a:p>
@@ -13909,7 +13909,7 @@
                   <a:srgbClr val="2B3550"/>
                 </a:solidFill>
               </a:rPr>
-              <a:t>요일과 시간을 적어요. 이틀 수업이면 같은 칸에서 Alt+Enter로 줄을 바꿔요</a:t>
+              <a:t>어느 달·호 계획안인지 적어요. 11월에 10월호 수업이면 '10월', 호 과정은 '2호'. 비우면 수업일의 달</a:t>
             </a:r>
             <a:endParaRPr lang="en-US" sz="1300" dirty="0"/>
           </a:p>
@@ -13945,7 +13945,7 @@
                   <a:srgbClr val="5B6680"/>
                 </a:solidFill>
               </a:rPr>
-              <a:t>첫 줄 제목(No, 팀 여부, 이름, 수업요일, 단계, 수업일, 특이사항, 인원)은 그대로 두세요</a:t>
+              <a:t>첫 줄 제목(No, 팀 여부, 이름, 수업요일, 단계, 수업월호, 수업일, 특이사항, 인원)은 그대로 두세요</a:t>
             </a:r>
             <a:endParaRPr lang="en-US" sz="1300" dirty="0"/>
           </a:p>

--- a/forms/한우리_수업도우미_사용안내.pptx
+++ b/forms/한우리_수업도우미_사용안내.pptx
@@ -16147,7 +16147,7 @@
         <p:spPr>
           <a:xfrm>
             <a:off x="4526280" y="1426464"/>
-            <a:ext cx="3291840" cy="1161288"/>
+            <a:ext cx="3291840" cy="1097280"/>
           </a:xfrm>
           <a:prstGeom prst="rect">
             <a:avLst/>
@@ -16166,14 +16166,14 @@
               <a:buNone/>
             </a:pPr>
             <a:r>
-              <a:rPr lang="en-US" sz="1700" b="1" dirty="0">
+              <a:rPr lang="en-US" sz="1600" b="1" dirty="0">
                 <a:solidFill>
                   <a:srgbClr val="2B3550"/>
                 </a:solidFill>
               </a:rPr>
               <a:t>이름과 수업일이 맞는지 확인해요</a:t>
             </a:r>
-            <a:endParaRPr lang="en-US" sz="1700" dirty="0"/>
+            <a:endParaRPr lang="en-US" sz="1600" dirty="0"/>
           </a:p>
           <a:p>
             <a:pPr indent="0" marL="0">
@@ -16183,14 +16183,14 @@
               <a:buNone/>
             </a:pPr>
             <a:r>
-              <a:rPr lang="en-US" sz="1400" dirty="0">
+              <a:rPr lang="en-US" sz="1300" dirty="0">
                 <a:solidFill>
                   <a:srgbClr val="5B6680"/>
                 </a:solidFill>
               </a:rPr>
               <a:t>반마다 미리보기가 하나씩 나와요</a:t>
             </a:r>
-            <a:endParaRPr lang="en-US" sz="1700" dirty="0"/>
+            <a:endParaRPr lang="en-US" sz="1600" dirty="0"/>
           </a:p>
         </p:txBody>
       </p:sp>
@@ -16202,7 +16202,7 @@
         </p:nvSpPr>
         <p:spPr>
           <a:xfrm>
-            <a:off x="3977640" y="2715768"/>
+            <a:off x="3977640" y="2651760"/>
             <a:ext cx="384048" cy="384048"/>
           </a:xfrm>
           <a:prstGeom prst="ellipse">
@@ -16227,7 +16227,7 @@
         </p:nvSpPr>
         <p:spPr>
           <a:xfrm>
-            <a:off x="3977640" y="2715768"/>
+            <a:off x="3977640" y="2651760"/>
             <a:ext cx="384048" cy="384048"/>
           </a:xfrm>
           <a:prstGeom prst="rect">
@@ -16263,8 +16263,8 @@
         </p:nvSpPr>
         <p:spPr>
           <a:xfrm>
-            <a:off x="4526280" y="2660904"/>
-            <a:ext cx="3291840" cy="1161288"/>
+            <a:off x="4526280" y="2596896"/>
+            <a:ext cx="3291840" cy="1097280"/>
           </a:xfrm>
           <a:prstGeom prst="rect">
             <a:avLst/>
@@ -16283,14 +16283,14 @@
               <a:buNone/>
             </a:pPr>
             <a:r>
-              <a:rPr lang="en-US" sz="1700" b="1" dirty="0">
+              <a:rPr lang="en-US" sz="1600" b="1" dirty="0">
                 <a:solidFill>
                   <a:srgbClr val="2B3550"/>
                 </a:solidFill>
               </a:rPr>
               <a:t>점선 글자를 누르면 고치는 칸이 열려요</a:t>
             </a:r>
-            <a:endParaRPr lang="en-US" sz="1700" dirty="0"/>
+            <a:endParaRPr lang="en-US" sz="1600" dirty="0"/>
           </a:p>
           <a:p>
             <a:pPr indent="0" marL="0">
@@ -16300,14 +16300,14 @@
               <a:buNone/>
             </a:pPr>
             <a:r>
-              <a:rPr lang="en-US" sz="1400" dirty="0">
+              <a:rPr lang="en-US" sz="1300" dirty="0">
                 <a:solidFill>
                   <a:srgbClr val="5B6680"/>
                 </a:solidFill>
               </a:rPr>
               <a:t>제목, 수업시간, 필독서, 소개, 인사말 모두 고칠 수 있어요</a:t>
             </a:r>
-            <a:endParaRPr lang="en-US" sz="1700" dirty="0"/>
+            <a:endParaRPr lang="en-US" sz="1600" dirty="0"/>
           </a:p>
         </p:txBody>
       </p:sp>
@@ -16319,7 +16319,7 @@
         </p:nvSpPr>
         <p:spPr>
           <a:xfrm>
-            <a:off x="3977640" y="3950208"/>
+            <a:off x="3977640" y="3822192"/>
             <a:ext cx="384048" cy="384048"/>
           </a:xfrm>
           <a:prstGeom prst="ellipse">
@@ -16344,7 +16344,7 @@
         </p:nvSpPr>
         <p:spPr>
           <a:xfrm>
-            <a:off x="3977640" y="3950208"/>
+            <a:off x="3977640" y="3822192"/>
             <a:ext cx="384048" cy="384048"/>
           </a:xfrm>
           <a:prstGeom prst="rect">
@@ -16380,8 +16380,8 @@
         </p:nvSpPr>
         <p:spPr>
           <a:xfrm>
-            <a:off x="4526280" y="3895344"/>
-            <a:ext cx="3291840" cy="1161288"/>
+            <a:off x="4526280" y="3767328"/>
+            <a:ext cx="3291840" cy="1097280"/>
           </a:xfrm>
           <a:prstGeom prst="rect">
             <a:avLst/>
@@ -16400,20 +16400,137 @@
               <a:buNone/>
             </a:pPr>
             <a:r>
-              <a:rPr lang="en-US" sz="1700" b="1" dirty="0">
+              <a:rPr lang="en-US" sz="1600" b="1" dirty="0">
                 <a:solidFill>
                   <a:srgbClr val="2B3550"/>
                 </a:solidFill>
               </a:rPr>
               <a:t>다 고치면 '다 고쳤어요'를 눌러요</a:t>
             </a:r>
-            <a:endParaRPr lang="en-US" sz="1700" dirty="0"/>
-          </a:p>
-        </p:txBody>
-      </p:sp>
-      <p:sp>
-        <p:nvSpPr>
-          <p:cNvPr id="16" name="card"/>
+            <a:endParaRPr lang="en-US" sz="1600" dirty="0"/>
+          </a:p>
+        </p:txBody>
+      </p:sp>
+      <p:sp>
+        <p:nvSpPr>
+          <p:cNvPr id="16" name="num4"/>
+          <p:cNvSpPr/>
+          <p:nvPr/>
+        </p:nvSpPr>
+        <p:spPr>
+          <a:xfrm>
+            <a:off x="3977640" y="4992624"/>
+            <a:ext cx="384048" cy="384048"/>
+          </a:xfrm>
+          <a:prstGeom prst="ellipse">
+            <a:avLst/>
+          </a:prstGeom>
+          <a:solidFill>
+            <a:srgbClr val="1F2A4A"/>
+          </a:solidFill>
+          <a:ln w="12700">
+            <a:solidFill>
+              <a:srgbClr val="1F2A4A"/>
+            </a:solidFill>
+            <a:prstDash val="solid"/>
+          </a:ln>
+        </p:spPr>
+      </p:sp>
+      <p:sp>
+        <p:nvSpPr>
+          <p:cNvPr id="17" name="Text 14"/>
+          <p:cNvSpPr txBox="1"/>
+          <p:nvPr/>
+        </p:nvSpPr>
+        <p:spPr>
+          <a:xfrm>
+            <a:off x="3977640" y="4992624"/>
+            <a:ext cx="384048" cy="384048"/>
+          </a:xfrm>
+          <a:prstGeom prst="rect">
+            <a:avLst/>
+          </a:prstGeom>
+          <a:noFill/>
+          <a:ln/>
+        </p:spPr>
+        <p:txBody>
+          <a:bodyPr wrap="square" lIns="0" tIns="0" rIns="0" bIns="0" rtlCol="0" anchor="ctr"/>
+          <a:lstStyle/>
+          <a:p>
+            <a:pPr algn="ctr" indent="0" marL="0">
+              <a:buNone/>
+            </a:pPr>
+            <a:r>
+              <a:rPr lang="en-US" sz="1600" b="1" dirty="0">
+                <a:solidFill>
+                  <a:srgbClr val="FFFFFF"/>
+                </a:solidFill>
+              </a:rPr>
+              <a:t>4</a:t>
+            </a:r>
+            <a:endParaRPr lang="en-US" sz="1600" dirty="0"/>
+          </a:p>
+        </p:txBody>
+      </p:sp>
+      <p:sp>
+        <p:nvSpPr>
+          <p:cNvPr id="18" name="Text 15"/>
+          <p:cNvSpPr txBox="1"/>
+          <p:nvPr/>
+        </p:nvSpPr>
+        <p:spPr>
+          <a:xfrm>
+            <a:off x="4526280" y="4937760"/>
+            <a:ext cx="3291840" cy="1097280"/>
+          </a:xfrm>
+          <a:prstGeom prst="rect">
+            <a:avLst/>
+          </a:prstGeom>
+          <a:noFill/>
+          <a:ln/>
+        </p:spPr>
+        <p:txBody>
+          <a:bodyPr wrap="square" lIns="0" tIns="0" rIns="0" bIns="0" rtlCol="0" anchor="t"/>
+          <a:lstStyle/>
+          <a:p>
+            <a:pPr indent="0" marL="0">
+              <a:spcAft>
+                <a:spcPts val="200"/>
+              </a:spcAft>
+              <a:buNone/>
+            </a:pPr>
+            <a:r>
+              <a:rPr lang="en-US" sz="1600" b="1" dirty="0">
+                <a:solidFill>
+                  <a:srgbClr val="2B3550"/>
+                </a:solidFill>
+              </a:rPr>
+              <a:t>차시를 바꿔서 수업하면</a:t>
+            </a:r>
+            <a:endParaRPr lang="en-US" sz="1600" dirty="0"/>
+          </a:p>
+          <a:p>
+            <a:pPr indent="0" marL="0">
+              <a:spcAft>
+                <a:spcPts val="200"/>
+              </a:spcAft>
+              <a:buNone/>
+            </a:pPr>
+            <a:r>
+              <a:rPr lang="en-US" sz="1300" dirty="0">
+                <a:solidFill>
+                  <a:srgbClr val="5B6680"/>
+                </a:solidFill>
+              </a:rPr>
+              <a:t>'차시 순서' 칸에 4,3,2,1처럼 적어요. 숙제 안내문도 같이 바뀌어요</a:t>
+            </a:r>
+            <a:endParaRPr lang="en-US" sz="1600" dirty="0"/>
+          </a:p>
+        </p:txBody>
+      </p:sp>
+      <p:sp>
+        <p:nvSpPr>
+          <p:cNvPr id="19" name="card"/>
           <p:cNvSpPr/>
           <p:nvPr/>
         </p:nvSpPr>
@@ -16440,7 +16557,7 @@
       </p:sp>
       <p:pic>
         <p:nvPicPr>
-          <p:cNvPr id="17" name="Image 1" descr="preencoded.png">    </p:cNvPr>
+          <p:cNvPr id="20" name="Image 1" descr="preencoded.png">    </p:cNvPr>
           <p:cNvPicPr>
             <a:picLocks noChangeAspect="1"/>
           </p:cNvPicPr>
@@ -16464,7 +16581,7 @@
       </p:pic>
       <p:sp>
         <p:nvSpPr>
-          <p:cNvPr id="18" name="Text 14"/>
+          <p:cNvPr id="21" name="Text 17"/>
           <p:cNvSpPr txBox="1"/>
           <p:nvPr/>
         </p:nvSpPr>
@@ -16500,7 +16617,7 @@
       </p:sp>
       <p:pic>
         <p:nvPicPr>
-          <p:cNvPr id="19" name="Image 2" descr="노란 안내 화면">    </p:cNvPr>
+          <p:cNvPr id="22" name="Image 2" descr="노란 안내 화면">    </p:cNvPr>
           <p:cNvPicPr>
             <a:picLocks noChangeAspect="1"/>
           </p:cNvPicPr>
@@ -16524,7 +16641,7 @@
       </p:pic>
       <p:sp>
         <p:nvSpPr>
-          <p:cNvPr id="20" name="Text 15"/>
+          <p:cNvPr id="23" name="Text 18"/>
           <p:cNvSpPr txBox="1"/>
           <p:nvPr/>
         </p:nvSpPr>
